--- a/proposals/機種分析/モンスターハンターライズ/mhrise_guide_v1.pptx
+++ b/proposals/機種分析/モンスターハンターライズ/mhrise_guide_v1.pptx
@@ -4063,8 +4063,8 @@
         </p:nvSpPr>
         <p:spPr>
           <a:xfrm>
-            <a:off x="5166360" y="502920"/>
-            <a:ext cx="3749039" cy="1188720"/>
+            <a:off x="5166360" y="365760"/>
+            <a:ext cx="3749039" cy="1143000"/>
           </a:xfrm>
           <a:prstGeom prst="rect">
             <a:avLst/>
@@ -4108,8 +4108,8 @@
         </p:nvSpPr>
         <p:spPr>
           <a:xfrm>
-            <a:off x="5166360" y="502920"/>
-            <a:ext cx="60000" cy="1188720"/>
+            <a:off x="5166360" y="365760"/>
+            <a:ext cx="60000" cy="1143000"/>
           </a:xfrm>
           <a:prstGeom prst="rect">
             <a:avLst/>
@@ -4151,8 +4151,8 @@
         </p:nvSpPr>
         <p:spPr>
           <a:xfrm>
-            <a:off x="5349240" y="567920"/>
-            <a:ext cx="3474720" cy="310000"/>
+            <a:off x="5349240" y="420760"/>
+            <a:ext cx="3474720" cy="290000"/>
           </a:xfrm>
           <a:prstGeom prst="rect">
             <a:avLst/>
@@ -4186,8 +4186,8 @@
         </p:nvSpPr>
         <p:spPr>
           <a:xfrm>
-            <a:off x="5349240" y="882920"/>
-            <a:ext cx="3474720" cy="450000"/>
+            <a:off x="5349240" y="715760"/>
+            <a:ext cx="3474720" cy="430000"/>
           </a:xfrm>
           <a:prstGeom prst="rect">
             <a:avLst/>
@@ -4223,8 +4223,8 @@
         </p:nvSpPr>
         <p:spPr>
           <a:xfrm>
-            <a:off x="5166360" y="2042920"/>
-            <a:ext cx="3749039" cy="1188720"/>
+            <a:off x="5166360" y="1855760"/>
+            <a:ext cx="3749039" cy="1143000"/>
           </a:xfrm>
           <a:prstGeom prst="rect">
             <a:avLst/>
@@ -4268,8 +4268,8 @@
         </p:nvSpPr>
         <p:spPr>
           <a:xfrm>
-            <a:off x="5166360" y="2042920"/>
-            <a:ext cx="60000" cy="1188720"/>
+            <a:off x="5166360" y="1855760"/>
+            <a:ext cx="60000" cy="1143000"/>
           </a:xfrm>
           <a:prstGeom prst="rect">
             <a:avLst/>
@@ -4311,8 +4311,8 @@
         </p:nvSpPr>
         <p:spPr>
           <a:xfrm>
-            <a:off x="5349240" y="2107920"/>
-            <a:ext cx="3474720" cy="310000"/>
+            <a:off x="5349240" y="1910760"/>
+            <a:ext cx="3474720" cy="290000"/>
           </a:xfrm>
           <a:prstGeom prst="rect">
             <a:avLst/>
@@ -4346,8 +4346,8 @@
         </p:nvSpPr>
         <p:spPr>
           <a:xfrm>
-            <a:off x="5349240" y="2422920"/>
-            <a:ext cx="3474720" cy="450000"/>
+            <a:off x="5349240" y="2205760"/>
+            <a:ext cx="3474720" cy="430000"/>
           </a:xfrm>
           <a:prstGeom prst="rect">
             <a:avLst/>
@@ -4383,8 +4383,8 @@
         </p:nvSpPr>
         <p:spPr>
           <a:xfrm>
-            <a:off x="5166360" y="3582920"/>
-            <a:ext cx="3749039" cy="1188720"/>
+            <a:off x="5166360" y="3345760"/>
+            <a:ext cx="3749039" cy="1143000"/>
           </a:xfrm>
           <a:prstGeom prst="rect">
             <a:avLst/>
@@ -4428,8 +4428,8 @@
         </p:nvSpPr>
         <p:spPr>
           <a:xfrm>
-            <a:off x="5166360" y="3582920"/>
-            <a:ext cx="60000" cy="1188720"/>
+            <a:off x="5166360" y="3345760"/>
+            <a:ext cx="60000" cy="1143000"/>
           </a:xfrm>
           <a:prstGeom prst="rect">
             <a:avLst/>
@@ -4471,8 +4471,8 @@
         </p:nvSpPr>
         <p:spPr>
           <a:xfrm>
-            <a:off x="5349240" y="3647920"/>
-            <a:ext cx="3474720" cy="310000"/>
+            <a:off x="5349240" y="3400760"/>
+            <a:ext cx="3474720" cy="290000"/>
           </a:xfrm>
           <a:prstGeom prst="rect">
             <a:avLst/>
@@ -4506,8 +4506,8 @@
         </p:nvSpPr>
         <p:spPr>
           <a:xfrm>
-            <a:off x="5349240" y="3962920"/>
-            <a:ext cx="3474720" cy="450000"/>
+            <a:off x="5349240" y="3695760"/>
+            <a:ext cx="3474720" cy="430000"/>
           </a:xfrm>
           <a:prstGeom prst="rect">
             <a:avLst/>
@@ -4884,7 +4884,7 @@
                 </a:solidFill>
                 <a:latin typeface="游明朝"/>
               </a:rPr>
-              <a:t>ゲームフロー全体図 ── 通常時→CZ→AT→上位ATの全ルート</a:t>
+              <a:t>ゲームフロー全体図 ── 通常3ルート→AT集会所ループ→気焔万丈</a:t>
             </a:r>
           </a:p>
         </p:txBody>
@@ -4976,7 +4976,7 @@
         <p:spPr>
           <a:xfrm>
             <a:off x="256032" y="685800"/>
-            <a:ext cx="1481328" cy="1100000"/>
+            <a:ext cx="1417320" cy="1350000"/>
           </a:xfrm>
           <a:prstGeom prst="rect">
             <a:avLst/>
@@ -5020,8 +5020,8 @@
         </p:nvSpPr>
         <p:spPr>
           <a:xfrm>
-            <a:off x="291032" y="755800"/>
-            <a:ext cx="1421328" cy="360000"/>
+            <a:off x="291032" y="765800"/>
+            <a:ext cx="1357320" cy="390000"/>
           </a:xfrm>
           <a:prstGeom prst="rect">
             <a:avLst/>
@@ -5055,8 +5055,8 @@
         </p:nvSpPr>
         <p:spPr>
           <a:xfrm>
-            <a:off x="281032" y="1165800"/>
-            <a:ext cx="1436328" cy="520000"/>
+            <a:off x="281032" y="1205800"/>
+            <a:ext cx="1372320" cy="760000"/>
           </a:xfrm>
           <a:prstGeom prst="rect">
             <a:avLst/>
@@ -5078,8 +5078,8 @@
                 <a:latin typeface="メイリオ"/>
               </a:rPr>
               <a:t>カムラポイント蓄積
-レア役直撃抽選
-リプレイ規定でCZ</a:t>
+ステージ変化
+[大社跡→溶岩洞]</a:t>
             </a:r>
           </a:p>
         </p:txBody>
@@ -5092,14 +5092,14 @@
         </p:nvSpPr>
         <p:spPr>
           <a:xfrm>
-            <a:off x="1745360" y="1145800"/>
+            <a:off x="1681352" y="1270800"/>
             <a:ext cx="200000" cy="180000"/>
           </a:xfrm>
           <a:prstGeom prst="can">
             <a:avLst/>
           </a:prstGeom>
           <a:solidFill>
-            <a:srgbClr val="22AA44"/>
+            <a:srgbClr val="22CCDD"/>
           </a:solidFill>
           <a:ln>
             <a:noFill/>
@@ -5135,8 +5135,169 @@
         </p:nvSpPr>
         <p:spPr>
           <a:xfrm>
-            <a:off x="1865376" y="685800"/>
-            <a:ext cx="1481328" cy="1100000"/>
+            <a:off x="1801368" y="685800"/>
+            <a:ext cx="1417320" cy="1350000"/>
+          </a:xfrm>
+          <a:prstGeom prst="rect">
+            <a:avLst/>
+          </a:prstGeom>
+          <a:solidFill>
+            <a:srgbClr val="181208"/>
+          </a:solidFill>
+          <a:ln w="22860">
+            <a:solidFill>
+              <a:srgbClr val="22CCDD"/>
+            </a:solidFill>
+          </a:ln>
+        </p:spPr>
+        <p:style>
+          <a:lnRef idx="1">
+            <a:schemeClr val="accent1"/>
+          </a:lnRef>
+          <a:fillRef idx="3">
+            <a:schemeClr val="accent1"/>
+          </a:fillRef>
+          <a:effectRef idx="2">
+            <a:schemeClr val="accent1"/>
+          </a:effectRef>
+          <a:fontRef idx="minor">
+            <a:schemeClr val="lt1"/>
+          </a:fontRef>
+        </p:style>
+        <p:txBody>
+          <a:bodyPr rtlCol="0" anchor="ctr"/>
+          <a:lstStyle/>
+          <a:p>
+            <a:pPr algn="ctr"/>
+          </a:p>
+        </p:txBody>
+      </p:sp>
+      <p:sp>
+        <p:nvSpPr>
+          <p:cNvPr id="13" name="TextBox 12"/>
+          <p:cNvSpPr txBox="1"/>
+          <p:nvPr/>
+        </p:nvSpPr>
+        <p:spPr>
+          <a:xfrm>
+            <a:off x="1836368" y="765800"/>
+            <a:ext cx="1357320" cy="390000"/>
+          </a:xfrm>
+          <a:prstGeom prst="rect">
+            <a:avLst/>
+          </a:prstGeom>
+          <a:noFill/>
+        </p:spPr>
+        <p:txBody>
+          <a:bodyPr wrap="square">
+            <a:spAutoFit/>
+          </a:bodyPr>
+          <a:lstStyle/>
+          <a:p>
+            <a:pPr algn="ctr"/>
+            <a:r>
+              <a:rPr sz="950" b="1">
+                <a:solidFill>
+                  <a:srgbClr val="22CCDD"/>
+                </a:solidFill>
+                <a:latin typeface="游明朝"/>
+              </a:rPr>
+              <a:t>クエスト
+(規定PT到達)</a:t>
+            </a:r>
+          </a:p>
+        </p:txBody>
+      </p:sp>
+      <p:sp>
+        <p:nvSpPr>
+          <p:cNvPr id="14" name="TextBox 13"/>
+          <p:cNvSpPr txBox="1"/>
+          <p:nvPr/>
+        </p:nvSpPr>
+        <p:spPr>
+          <a:xfrm>
+            <a:off x="1826368" y="1205800"/>
+            <a:ext cx="1372320" cy="760000"/>
+          </a:xfrm>
+          <a:prstGeom prst="rect">
+            <a:avLst/>
+          </a:prstGeom>
+          <a:noFill/>
+        </p:spPr>
+        <p:txBody>
+          <a:bodyPr wrap="square">
+            <a:spAutoFit/>
+          </a:bodyPr>
+          <a:lstStyle/>
+          <a:p>
+            <a:pPr algn="ctr"/>
+            <a:r>
+              <a:rPr sz="750" b="0">
+                <a:solidFill>
+                  <a:srgbClr val="999080"/>
+                </a:solidFill>
+                <a:latin typeface="メイリオ"/>
+              </a:rPr>
+              <a:t>カムラPT到達で
+クエスト発展
+成功でAT直入り</a:t>
+            </a:r>
+          </a:p>
+        </p:txBody>
+      </p:sp>
+      <p:sp>
+        <p:nvSpPr>
+          <p:cNvPr id="15" name="Can 14"/>
+          <p:cNvSpPr/>
+          <p:nvPr/>
+        </p:nvSpPr>
+        <p:spPr>
+          <a:xfrm>
+            <a:off x="3226688" y="1270800"/>
+            <a:ext cx="200000" cy="180000"/>
+          </a:xfrm>
+          <a:prstGeom prst="can">
+            <a:avLst/>
+          </a:prstGeom>
+          <a:solidFill>
+            <a:srgbClr val="22AA44"/>
+          </a:solidFill>
+          <a:ln>
+            <a:noFill/>
+          </a:ln>
+        </p:spPr>
+        <p:style>
+          <a:lnRef idx="1">
+            <a:schemeClr val="accent1"/>
+          </a:lnRef>
+          <a:fillRef idx="3">
+            <a:schemeClr val="accent1"/>
+          </a:fillRef>
+          <a:effectRef idx="2">
+            <a:schemeClr val="accent1"/>
+          </a:effectRef>
+          <a:fontRef idx="minor">
+            <a:schemeClr val="lt1"/>
+          </a:fontRef>
+        </p:style>
+        <p:txBody>
+          <a:bodyPr rtlCol="0" anchor="ctr"/>
+          <a:lstStyle/>
+          <a:p>
+            <a:pPr algn="ctr"/>
+          </a:p>
+        </p:txBody>
+      </p:sp>
+      <p:sp>
+        <p:nvSpPr>
+          <p:cNvPr id="16" name="Rectangle 15"/>
+          <p:cNvSpPr/>
+          <p:nvPr/>
+        </p:nvSpPr>
+        <p:spPr>
+          <a:xfrm>
+            <a:off x="3346704" y="685800"/>
+            <a:ext cx="1417320" cy="1350000"/>
           </a:xfrm>
           <a:prstGeom prst="rect">
             <a:avLst/>
@@ -5174,14 +5335,14 @@
       </p:sp>
       <p:sp>
         <p:nvSpPr>
-          <p:cNvPr id="13" name="TextBox 12"/>
-          <p:cNvSpPr txBox="1"/>
-          <p:nvPr/>
-        </p:nvSpPr>
-        <p:spPr>
-          <a:xfrm>
-            <a:off x="1900376" y="755800"/>
-            <a:ext cx="1421328" cy="360000"/>
+          <p:cNvPr id="17" name="TextBox 16"/>
+          <p:cNvSpPr txBox="1"/>
+          <p:nvPr/>
+        </p:nvSpPr>
+        <p:spPr>
+          <a:xfrm>
+            <a:off x="3381704" y="765800"/>
+            <a:ext cx="1357320" cy="390000"/>
           </a:xfrm>
           <a:prstGeom prst="rect">
             <a:avLst/>
@@ -5202,22 +5363,22 @@
                 </a:solidFill>
                 <a:latin typeface="游明朝"/>
               </a:rPr>
-              <a:t>アイルーだるま
-落とし(CZ)</a:t>
-            </a:r>
-          </a:p>
-        </p:txBody>
-      </p:sp>
-      <p:sp>
-        <p:nvSpPr>
-          <p:cNvPr id="14" name="TextBox 13"/>
-          <p:cNvSpPr txBox="1"/>
-          <p:nvPr/>
-        </p:nvSpPr>
-        <p:spPr>
-          <a:xfrm>
-            <a:off x="1890376" y="1165800"/>
-            <a:ext cx="1436328" cy="520000"/>
+              <a:t>だるま落とし
+(CZ)</a:t>
+            </a:r>
+          </a:p>
+        </p:txBody>
+      </p:sp>
+      <p:sp>
+        <p:nvSpPr>
+          <p:cNvPr id="18" name="TextBox 17"/>
+          <p:cNvSpPr txBox="1"/>
+          <p:nvPr/>
+        </p:nvSpPr>
+        <p:spPr>
+          <a:xfrm>
+            <a:off x="3371704" y="1205800"/>
+            <a:ext cx="1372320" cy="760000"/>
           </a:xfrm>
           <a:prstGeom prst="rect">
             <a:avLst/>
@@ -5239,21 +5400,21 @@
                 <a:latin typeface="メイリオ"/>
               </a:rPr>
               <a:t>リプレイ規定回数
-（最大200回）で
-突入するメインCZ</a:t>
-            </a:r>
-          </a:p>
-        </p:txBody>
-      </p:sp>
-      <p:sp>
-        <p:nvSpPr>
-          <p:cNvPr id="15" name="Can 14"/>
+到達で突入
+自力突破タイプ</a:t>
+            </a:r>
+          </a:p>
+        </p:txBody>
+      </p:sp>
+      <p:sp>
+        <p:nvSpPr>
+          <p:cNvPr id="19" name="Can 18"/>
           <p:cNvSpPr/>
           <p:nvPr/>
         </p:nvSpPr>
         <p:spPr>
           <a:xfrm>
-            <a:off x="3354704" y="1145800"/>
+            <a:off x="4772024" y="1270800"/>
             <a:ext cx="200000" cy="180000"/>
           </a:xfrm>
           <a:prstGeom prst="can">
@@ -5290,14 +5451,14 @@
       </p:sp>
       <p:sp>
         <p:nvSpPr>
-          <p:cNvPr id="16" name="Rectangle 15"/>
+          <p:cNvPr id="20" name="Rectangle 19"/>
           <p:cNvSpPr/>
           <p:nvPr/>
         </p:nvSpPr>
         <p:spPr>
           <a:xfrm>
-            <a:off x="3474720" y="685800"/>
-            <a:ext cx="1481328" cy="1100000"/>
+            <a:off x="4892040" y="685800"/>
+            <a:ext cx="1417320" cy="1350000"/>
           </a:xfrm>
           <a:prstGeom prst="rect">
             <a:avLst/>
@@ -5335,14 +5496,14 @@
       </p:sp>
       <p:sp>
         <p:nvSpPr>
-          <p:cNvPr id="17" name="TextBox 16"/>
-          <p:cNvSpPr txBox="1"/>
-          <p:nvPr/>
-        </p:nvSpPr>
-        <p:spPr>
-          <a:xfrm>
-            <a:off x="3509720" y="755800"/>
-            <a:ext cx="1421328" cy="360000"/>
+          <p:cNvPr id="21" name="TextBox 20"/>
+          <p:cNvSpPr txBox="1"/>
+          <p:nvPr/>
+        </p:nvSpPr>
+        <p:spPr>
+          <a:xfrm>
+            <a:off x="4927040" y="765800"/>
+            <a:ext cx="1357320" cy="390000"/>
           </a:xfrm>
           <a:prstGeom prst="rect">
             <a:avLst/>
@@ -5371,14 +5532,14 @@
       </p:sp>
       <p:sp>
         <p:nvSpPr>
-          <p:cNvPr id="18" name="TextBox 17"/>
-          <p:cNvSpPr txBox="1"/>
-          <p:nvPr/>
-        </p:nvSpPr>
-        <p:spPr>
-          <a:xfrm>
-            <a:off x="3499720" y="1165800"/>
-            <a:ext cx="1436328" cy="520000"/>
+          <p:cNvPr id="22" name="TextBox 21"/>
+          <p:cNvSpPr txBox="1"/>
+          <p:nvPr/>
+        </p:nvSpPr>
+        <p:spPr>
+          <a:xfrm>
+            <a:off x="4917040" y="1205800"/>
+            <a:ext cx="1372320" cy="760000"/>
           </a:xfrm>
           <a:prstGeom prst="rect">
             <a:avLst/>
@@ -5399,22 +5560,22 @@
                 </a:solidFill>
                 <a:latin typeface="メイリオ"/>
               </a:rPr>
-              <a:t>12G継続CZ
+              <a:t>規定PT到達の一部
 成功率約70%
-大連続ボーナス濃厚</a:t>
-            </a:r>
-          </a:p>
-        </p:txBody>
-      </p:sp>
-      <p:sp>
-        <p:nvSpPr>
-          <p:cNvPr id="19" name="Can 18"/>
+大連続BONUS確定</a:t>
+            </a:r>
+          </a:p>
+        </p:txBody>
+      </p:sp>
+      <p:sp>
+        <p:nvSpPr>
+          <p:cNvPr id="23" name="Can 22"/>
           <p:cNvSpPr/>
           <p:nvPr/>
         </p:nvSpPr>
         <p:spPr>
           <a:xfrm>
-            <a:off x="4964048" y="1145800"/>
+            <a:off x="6317360" y="1270800"/>
             <a:ext cx="200000" cy="180000"/>
           </a:xfrm>
           <a:prstGeom prst="can">
@@ -5451,14 +5612,14 @@
       </p:sp>
       <p:sp>
         <p:nvSpPr>
-          <p:cNvPr id="20" name="Rectangle 19"/>
+          <p:cNvPr id="24" name="Rectangle 23"/>
           <p:cNvSpPr/>
           <p:nvPr/>
         </p:nvSpPr>
         <p:spPr>
           <a:xfrm>
-            <a:off x="5084064" y="685800"/>
-            <a:ext cx="1481328" cy="1100000"/>
+            <a:off x="6437376" y="685800"/>
+            <a:ext cx="1417320" cy="1350000"/>
           </a:xfrm>
           <a:prstGeom prst="rect">
             <a:avLst/>
@@ -5496,14 +5657,14 @@
       </p:sp>
       <p:sp>
         <p:nvSpPr>
-          <p:cNvPr id="21" name="TextBox 20"/>
-          <p:cNvSpPr txBox="1"/>
-          <p:nvPr/>
-        </p:nvSpPr>
-        <p:spPr>
-          <a:xfrm>
-            <a:off x="5119064" y="755800"/>
-            <a:ext cx="1421328" cy="360000"/>
+          <p:cNvPr id="25" name="TextBox 24"/>
+          <p:cNvSpPr txBox="1"/>
+          <p:nvPr/>
+        </p:nvSpPr>
+        <p:spPr>
+          <a:xfrm>
+            <a:off x="6472376" y="765800"/>
+            <a:ext cx="1357320" cy="390000"/>
           </a:xfrm>
           <a:prstGeom prst="rect">
             <a:avLst/>
@@ -5525,21 +5686,21 @@
                 <a:latin typeface="游明朝"/>
               </a:rPr>
               <a:t>狩猟ボーナス
-(メインAT)</a:t>
-            </a:r>
-          </a:p>
-        </p:txBody>
-      </p:sp>
-      <p:sp>
-        <p:nvSpPr>
-          <p:cNvPr id="22" name="TextBox 21"/>
-          <p:cNvSpPr txBox="1"/>
-          <p:nvPr/>
-        </p:nvSpPr>
-        <p:spPr>
-          <a:xfrm>
-            <a:off x="5109064" y="1165800"/>
-            <a:ext cx="1436328" cy="520000"/>
+(AT入口)</a:t>
+            </a:r>
+          </a:p>
+        </p:txBody>
+      </p:sp>
+      <p:sp>
+        <p:nvSpPr>
+          <p:cNvPr id="26" name="TextBox 25"/>
+          <p:cNvSpPr txBox="1"/>
+          <p:nvPr/>
+        </p:nvSpPr>
+        <p:spPr>
+          <a:xfrm>
+            <a:off x="6462376" y="1205800"/>
+            <a:ext cx="1372320" cy="760000"/>
           </a:xfrm>
           <a:prstGeom prst="rect">
             <a:avLst/>
@@ -5560,29 +5721,64 @@
                 </a:solidFill>
                 <a:latin typeface="メイリオ"/>
               </a:rPr>
-              <a:t>純増2.7or4.0枚/G
-モンスター討伐で
-継続するループ型</a:t>
-            </a:r>
-          </a:p>
-        </p:txBody>
-      </p:sp>
-      <p:sp>
-        <p:nvSpPr>
-          <p:cNvPr id="23" name="Can 22"/>
+              <a:t>BAR/赤7/紫7の3種
+純増2.7or4.0枚/G
+超抽選バトル</a:t>
+            </a:r>
+          </a:p>
+        </p:txBody>
+      </p:sp>
+      <p:sp>
+        <p:nvSpPr>
+          <p:cNvPr id="27" name="TextBox 26"/>
+          <p:cNvSpPr txBox="1"/>
+          <p:nvPr/>
+        </p:nvSpPr>
+        <p:spPr>
+          <a:xfrm>
+            <a:off x="256032" y="2055800"/>
+            <a:ext cx="3840480" cy="250000"/>
+          </a:xfrm>
+          <a:prstGeom prst="rect">
+            <a:avLst/>
+          </a:prstGeom>
+          <a:noFill/>
+        </p:spPr>
+        <p:txBody>
+          <a:bodyPr wrap="square">
+            <a:spAutoFit/>
+          </a:bodyPr>
+          <a:lstStyle/>
+          <a:p>
+            <a:pPr algn="l"/>
+            <a:r>
+              <a:rPr sz="750" b="0">
+                <a:solidFill>
+                  <a:srgbClr val="22CCDD"/>
+                </a:solidFill>
+                <a:latin typeface="メイリオ"/>
+              </a:rPr>
+              <a:t>レア役→ライズゾーン(PT特化・20セット完走でAT濃厚)→クエストへ合流</a:t>
+            </a:r>
+          </a:p>
+        </p:txBody>
+      </p:sp>
+      <p:sp>
+        <p:nvSpPr>
+          <p:cNvPr id="28" name="Rectangle 27"/>
           <p:cNvSpPr/>
           <p:nvPr/>
         </p:nvSpPr>
         <p:spPr>
           <a:xfrm>
-            <a:off x="6573392" y="1145800"/>
-            <a:ext cx="200000" cy="180000"/>
-          </a:xfrm>
-          <a:prstGeom prst="can">
-            <a:avLst/>
-          </a:prstGeom>
-          <a:solidFill>
-            <a:srgbClr val="22AA44"/>
+            <a:off x="256032" y="2285800"/>
+            <a:ext cx="3840480" cy="5000"/>
+          </a:xfrm>
+          <a:prstGeom prst="rect">
+            <a:avLst/>
+          </a:prstGeom>
+          <a:solidFill>
+            <a:srgbClr val="22CCDD"/>
           </a:solidFill>
           <a:ln>
             <a:noFill/>
@@ -5612,20 +5808,742 @@
       </p:sp>
       <p:sp>
         <p:nvSpPr>
-          <p:cNvPr id="24" name="Rectangle 23"/>
+          <p:cNvPr id="29" name="TextBox 28"/>
+          <p:cNvSpPr txBox="1"/>
+          <p:nvPr/>
+        </p:nvSpPr>
+        <p:spPr>
+          <a:xfrm>
+            <a:off x="4370832" y="2055800"/>
+            <a:ext cx="2926080" cy="250000"/>
+          </a:xfrm>
+          <a:prstGeom prst="rect">
+            <a:avLst/>
+          </a:prstGeom>
+          <a:noFill/>
+        </p:spPr>
+        <p:txBody>
+          <a:bodyPr wrap="square">
+            <a:spAutoFit/>
+          </a:bodyPr>
+          <a:lstStyle/>
+          <a:p>
+            <a:pPr algn="l"/>
+            <a:r>
+              <a:rPr sz="750" b="0">
+                <a:solidFill>
+                  <a:srgbClr val="999080"/>
+                </a:solidFill>
+                <a:latin typeface="メイリオ"/>
+              </a:rPr>
+              <a:t>天井：リプレイ規定5セット目（累計200回）でCZ確定突入</a:t>
+            </a:r>
+          </a:p>
+        </p:txBody>
+      </p:sp>
+      <p:sp>
+        <p:nvSpPr>
+          <p:cNvPr id="30" name="Rectangle 29"/>
           <p:cNvSpPr/>
           <p:nvPr/>
         </p:nvSpPr>
         <p:spPr>
           <a:xfrm>
-            <a:off x="6693408" y="685800"/>
-            <a:ext cx="1481328" cy="1100000"/>
+            <a:off x="0" y="2450592"/>
+            <a:ext cx="9144000" cy="5000"/>
+          </a:xfrm>
+          <a:prstGeom prst="rect">
+            <a:avLst/>
+          </a:prstGeom>
+          <a:solidFill>
+            <a:srgbClr val="305018"/>
+          </a:solidFill>
+          <a:ln>
+            <a:noFill/>
+          </a:ln>
+        </p:spPr>
+        <p:style>
+          <a:lnRef idx="1">
+            <a:schemeClr val="accent1"/>
+          </a:lnRef>
+          <a:fillRef idx="3">
+            <a:schemeClr val="accent1"/>
+          </a:fillRef>
+          <a:effectRef idx="2">
+            <a:schemeClr val="accent1"/>
+          </a:effectRef>
+          <a:fontRef idx="minor">
+            <a:schemeClr val="lt1"/>
+          </a:fontRef>
+        </p:style>
+        <p:txBody>
+          <a:bodyPr rtlCol="0" anchor="ctr"/>
+          <a:lstStyle/>
+          <a:p>
+            <a:pPr algn="ctr"/>
+          </a:p>
+        </p:txBody>
+      </p:sp>
+      <p:sp>
+        <p:nvSpPr>
+          <p:cNvPr id="31" name="Rectangle 30"/>
+          <p:cNvSpPr/>
+          <p:nvPr/>
+        </p:nvSpPr>
+        <p:spPr>
+          <a:xfrm>
+            <a:off x="256032" y="2523744"/>
+            <a:ext cx="1508760" cy="1350000"/>
+          </a:xfrm>
+          <a:prstGeom prst="rect">
+            <a:avLst/>
+          </a:prstGeom>
+          <a:solidFill>
+            <a:srgbClr val="20180A"/>
+          </a:solidFill>
+          <a:ln w="22860">
+            <a:solidFill>
+              <a:srgbClr val="999080"/>
+            </a:solidFill>
+          </a:ln>
+        </p:spPr>
+        <p:style>
+          <a:lnRef idx="1">
+            <a:schemeClr val="accent1"/>
+          </a:lnRef>
+          <a:fillRef idx="3">
+            <a:schemeClr val="accent1"/>
+          </a:fillRef>
+          <a:effectRef idx="2">
+            <a:schemeClr val="accent1"/>
+          </a:effectRef>
+          <a:fontRef idx="minor">
+            <a:schemeClr val="lt1"/>
+          </a:fontRef>
+        </p:style>
+        <p:txBody>
+          <a:bodyPr rtlCol="0" anchor="ctr"/>
+          <a:lstStyle/>
+          <a:p>
+            <a:pPr algn="ctr"/>
+          </a:p>
+        </p:txBody>
+      </p:sp>
+      <p:sp>
+        <p:nvSpPr>
+          <p:cNvPr id="32" name="TextBox 31"/>
+          <p:cNvSpPr txBox="1"/>
+          <p:nvPr/>
+        </p:nvSpPr>
+        <p:spPr>
+          <a:xfrm>
+            <a:off x="291032" y="2603744"/>
+            <a:ext cx="1448760" cy="390000"/>
+          </a:xfrm>
+          <a:prstGeom prst="rect">
+            <a:avLst/>
+          </a:prstGeom>
+          <a:noFill/>
+        </p:spPr>
+        <p:txBody>
+          <a:bodyPr wrap="square">
+            <a:spAutoFit/>
+          </a:bodyPr>
+          <a:lstStyle/>
+          <a:p>
+            <a:pPr algn="ctr"/>
+            <a:r>
+              <a:rPr sz="950" b="1">
+                <a:solidFill>
+                  <a:srgbClr val="999080"/>
+                </a:solidFill>
+                <a:latin typeface="游明朝"/>
+              </a:rPr>
+              <a:t>集会所
+(ループ起点)</a:t>
+            </a:r>
+          </a:p>
+        </p:txBody>
+      </p:sp>
+      <p:sp>
+        <p:nvSpPr>
+          <p:cNvPr id="33" name="TextBox 32"/>
+          <p:cNvSpPr txBox="1"/>
+          <p:nvPr/>
+        </p:nvSpPr>
+        <p:spPr>
+          <a:xfrm>
+            <a:off x="281032" y="3043744"/>
+            <a:ext cx="1463760" cy="760000"/>
+          </a:xfrm>
+          <a:prstGeom prst="rect">
+            <a:avLst/>
+          </a:prstGeom>
+          <a:noFill/>
+        </p:spPr>
+        <p:txBody>
+          <a:bodyPr wrap="square">
+            <a:spAutoFit/>
+          </a:bodyPr>
+          <a:lstStyle/>
+          <a:p>
+            <a:pPr algn="ctr"/>
+            <a:r>
+              <a:rPr sz="750" b="0">
+                <a:solidFill>
+                  <a:srgbClr val="999080"/>
+                </a:solidFill>
+                <a:latin typeface="メイリオ"/>
+              </a:rPr>
+              <a:t>AT継続の起点
+討伐失敗でも
+ストックで復帰</a:t>
+            </a:r>
+          </a:p>
+        </p:txBody>
+      </p:sp>
+      <p:sp>
+        <p:nvSpPr>
+          <p:cNvPr id="34" name="Can 33"/>
+          <p:cNvSpPr/>
+          <p:nvPr/>
+        </p:nvSpPr>
+        <p:spPr>
+          <a:xfrm>
+            <a:off x="1774792" y="3108744"/>
+            <a:ext cx="200000" cy="180000"/>
+          </a:xfrm>
+          <a:prstGeom prst="can">
+            <a:avLst/>
+          </a:prstGeom>
+          <a:solidFill>
+            <a:srgbClr val="FF8800"/>
+          </a:solidFill>
+          <a:ln>
+            <a:noFill/>
+          </a:ln>
+        </p:spPr>
+        <p:style>
+          <a:lnRef idx="1">
+            <a:schemeClr val="accent1"/>
+          </a:lnRef>
+          <a:fillRef idx="3">
+            <a:schemeClr val="accent1"/>
+          </a:fillRef>
+          <a:effectRef idx="2">
+            <a:schemeClr val="accent1"/>
+          </a:effectRef>
+          <a:fontRef idx="minor">
+            <a:schemeClr val="lt1"/>
+          </a:fontRef>
+        </p:style>
+        <p:txBody>
+          <a:bodyPr rtlCol="0" anchor="ctr"/>
+          <a:lstStyle/>
+          <a:p>
+            <a:pPr algn="ctr"/>
+          </a:p>
+        </p:txBody>
+      </p:sp>
+      <p:sp>
+        <p:nvSpPr>
+          <p:cNvPr id="35" name="Rectangle 34"/>
+          <p:cNvSpPr/>
+          <p:nvPr/>
+        </p:nvSpPr>
+        <p:spPr>
+          <a:xfrm>
+            <a:off x="1920240" y="2523744"/>
+            <a:ext cx="1508760" cy="1350000"/>
           </a:xfrm>
           <a:prstGeom prst="rect">
             <a:avLst/>
           </a:prstGeom>
           <a:solidFill>
             <a:srgbClr val="181208"/>
+          </a:solidFill>
+          <a:ln w="22860">
+            <a:solidFill>
+              <a:srgbClr val="FF8800"/>
+            </a:solidFill>
+          </a:ln>
+        </p:spPr>
+        <p:style>
+          <a:lnRef idx="1">
+            <a:schemeClr val="accent1"/>
+          </a:lnRef>
+          <a:fillRef idx="3">
+            <a:schemeClr val="accent1"/>
+          </a:fillRef>
+          <a:effectRef idx="2">
+            <a:schemeClr val="accent1"/>
+          </a:effectRef>
+          <a:fontRef idx="minor">
+            <a:schemeClr val="lt1"/>
+          </a:fontRef>
+        </p:style>
+        <p:txBody>
+          <a:bodyPr rtlCol="0" anchor="ctr"/>
+          <a:lstStyle/>
+          <a:p>
+            <a:pPr algn="ctr"/>
+          </a:p>
+        </p:txBody>
+      </p:sp>
+      <p:sp>
+        <p:nvSpPr>
+          <p:cNvPr id="36" name="TextBox 35"/>
+          <p:cNvSpPr txBox="1"/>
+          <p:nvPr/>
+        </p:nvSpPr>
+        <p:spPr>
+          <a:xfrm>
+            <a:off x="1955240" y="2603744"/>
+            <a:ext cx="1448760" cy="390000"/>
+          </a:xfrm>
+          <a:prstGeom prst="rect">
+            <a:avLst/>
+          </a:prstGeom>
+          <a:noFill/>
+        </p:spPr>
+        <p:txBody>
+          <a:bodyPr wrap="square">
+            <a:spAutoFit/>
+          </a:bodyPr>
+          <a:lstStyle/>
+          <a:p>
+            <a:pPr algn="ctr"/>
+            <a:r>
+              <a:rPr sz="950" b="1">
+                <a:solidFill>
+                  <a:srgbClr val="FF8800"/>
+                </a:solidFill>
+                <a:latin typeface="游明朝"/>
+              </a:rPr>
+              <a:t>狩猟ボーナス
+(超抽選バトル)</a:t>
+            </a:r>
+          </a:p>
+        </p:txBody>
+      </p:sp>
+      <p:sp>
+        <p:nvSpPr>
+          <p:cNvPr id="37" name="TextBox 36"/>
+          <p:cNvSpPr txBox="1"/>
+          <p:nvPr/>
+        </p:nvSpPr>
+        <p:spPr>
+          <a:xfrm>
+            <a:off x="1945240" y="3043744"/>
+            <a:ext cx="1463760" cy="760000"/>
+          </a:xfrm>
+          <a:prstGeom prst="rect">
+            <a:avLst/>
+          </a:prstGeom>
+          <a:noFill/>
+        </p:spPr>
+        <p:txBody>
+          <a:bodyPr wrap="square">
+            <a:spAutoFit/>
+          </a:bodyPr>
+          <a:lstStyle/>
+          <a:p>
+            <a:pPr algn="ctr"/>
+            <a:r>
+              <a:rPr sz="750" b="0">
+                <a:solidFill>
+                  <a:srgbClr val="999080"/>
+                </a:solidFill>
+                <a:latin typeface="メイリオ"/>
+              </a:rPr>
+              <a:t>BAR/赤7/紫7の3種
+討伐成功→剥ぎ取り
+討伐失敗→集会所</a:t>
+            </a:r>
+          </a:p>
+        </p:txBody>
+      </p:sp>
+      <p:sp>
+        <p:nvSpPr>
+          <p:cNvPr id="38" name="Can 37"/>
+          <p:cNvSpPr/>
+          <p:nvPr/>
+        </p:nvSpPr>
+        <p:spPr>
+          <a:xfrm>
+            <a:off x="3439000" y="3108744"/>
+            <a:ext cx="200000" cy="180000"/>
+          </a:xfrm>
+          <a:prstGeom prst="can">
+            <a:avLst/>
+          </a:prstGeom>
+          <a:solidFill>
+            <a:srgbClr val="CCAA22"/>
+          </a:solidFill>
+          <a:ln>
+            <a:noFill/>
+          </a:ln>
+        </p:spPr>
+        <p:style>
+          <a:lnRef idx="1">
+            <a:schemeClr val="accent1"/>
+          </a:lnRef>
+          <a:fillRef idx="3">
+            <a:schemeClr val="accent1"/>
+          </a:fillRef>
+          <a:effectRef idx="2">
+            <a:schemeClr val="accent1"/>
+          </a:effectRef>
+          <a:fontRef idx="minor">
+            <a:schemeClr val="lt1"/>
+          </a:fontRef>
+        </p:style>
+        <p:txBody>
+          <a:bodyPr rtlCol="0" anchor="ctr"/>
+          <a:lstStyle/>
+          <a:p>
+            <a:pPr algn="ctr"/>
+          </a:p>
+        </p:txBody>
+      </p:sp>
+      <p:sp>
+        <p:nvSpPr>
+          <p:cNvPr id="39" name="Rectangle 38"/>
+          <p:cNvSpPr/>
+          <p:nvPr/>
+        </p:nvSpPr>
+        <p:spPr>
+          <a:xfrm>
+            <a:off x="3584448" y="2523744"/>
+            <a:ext cx="1508760" cy="1350000"/>
+          </a:xfrm>
+          <a:prstGeom prst="rect">
+            <a:avLst/>
+          </a:prstGeom>
+          <a:solidFill>
+            <a:srgbClr val="181208"/>
+          </a:solidFill>
+          <a:ln w="22860">
+            <a:solidFill>
+              <a:srgbClr val="22AA44"/>
+            </a:solidFill>
+          </a:ln>
+        </p:spPr>
+        <p:style>
+          <a:lnRef idx="1">
+            <a:schemeClr val="accent1"/>
+          </a:lnRef>
+          <a:fillRef idx="3">
+            <a:schemeClr val="accent1"/>
+          </a:fillRef>
+          <a:effectRef idx="2">
+            <a:schemeClr val="accent1"/>
+          </a:effectRef>
+          <a:fontRef idx="minor">
+            <a:schemeClr val="lt1"/>
+          </a:fontRef>
+        </p:style>
+        <p:txBody>
+          <a:bodyPr rtlCol="0" anchor="ctr"/>
+          <a:lstStyle/>
+          <a:p>
+            <a:pPr algn="ctr"/>
+          </a:p>
+        </p:txBody>
+      </p:sp>
+      <p:sp>
+        <p:nvSpPr>
+          <p:cNvPr id="40" name="TextBox 39"/>
+          <p:cNvSpPr txBox="1"/>
+          <p:nvPr/>
+        </p:nvSpPr>
+        <p:spPr>
+          <a:xfrm>
+            <a:off x="3619448" y="2603744"/>
+            <a:ext cx="1448760" cy="390000"/>
+          </a:xfrm>
+          <a:prstGeom prst="rect">
+            <a:avLst/>
+          </a:prstGeom>
+          <a:noFill/>
+        </p:spPr>
+        <p:txBody>
+          <a:bodyPr wrap="square">
+            <a:spAutoFit/>
+          </a:bodyPr>
+          <a:lstStyle/>
+          <a:p>
+            <a:pPr algn="ctr"/>
+            <a:r>
+              <a:rPr sz="950" b="1">
+                <a:solidFill>
+                  <a:srgbClr val="22AA44"/>
+                </a:solidFill>
+                <a:latin typeface="游明朝"/>
+              </a:rPr>
+              <a:t>剥ぎ取りチャンス
+/百竜刀</a:t>
+            </a:r>
+          </a:p>
+        </p:txBody>
+      </p:sp>
+      <p:sp>
+        <p:nvSpPr>
+          <p:cNvPr id="41" name="TextBox 40"/>
+          <p:cNvSpPr txBox="1"/>
+          <p:nvPr/>
+        </p:nvSpPr>
+        <p:spPr>
+          <a:xfrm>
+            <a:off x="3609448" y="3043744"/>
+            <a:ext cx="1463760" cy="760000"/>
+          </a:xfrm>
+          <a:prstGeom prst="rect">
+            <a:avLst/>
+          </a:prstGeom>
+          <a:noFill/>
+        </p:spPr>
+        <p:txBody>
+          <a:bodyPr wrap="square">
+            <a:spAutoFit/>
+          </a:bodyPr>
+          <a:lstStyle/>
+          <a:p>
+            <a:pPr algn="ctr"/>
+            <a:r>
+              <a:rPr sz="750" b="0">
+                <a:solidFill>
+                  <a:srgbClr val="999080"/>
+                </a:solidFill>
+                <a:latin typeface="メイリオ"/>
+              </a:rPr>
+              <a:t>討伐後の報酬タイム
+早期討伐で百竜刀
+(ストック特化)へ</a:t>
+            </a:r>
+          </a:p>
+        </p:txBody>
+      </p:sp>
+      <p:sp>
+        <p:nvSpPr>
+          <p:cNvPr id="42" name="Can 41"/>
+          <p:cNvSpPr/>
+          <p:nvPr/>
+        </p:nvSpPr>
+        <p:spPr>
+          <a:xfrm>
+            <a:off x="5103208" y="3108744"/>
+            <a:ext cx="200000" cy="180000"/>
+          </a:xfrm>
+          <a:prstGeom prst="can">
+            <a:avLst/>
+          </a:prstGeom>
+          <a:solidFill>
+            <a:srgbClr val="CCAA22"/>
+          </a:solidFill>
+          <a:ln>
+            <a:noFill/>
+          </a:ln>
+        </p:spPr>
+        <p:style>
+          <a:lnRef idx="1">
+            <a:schemeClr val="accent1"/>
+          </a:lnRef>
+          <a:fillRef idx="3">
+            <a:schemeClr val="accent1"/>
+          </a:fillRef>
+          <a:effectRef idx="2">
+            <a:schemeClr val="accent1"/>
+          </a:effectRef>
+          <a:fontRef idx="minor">
+            <a:schemeClr val="lt1"/>
+          </a:fontRef>
+        </p:style>
+        <p:txBody>
+          <a:bodyPr rtlCol="0" anchor="ctr"/>
+          <a:lstStyle/>
+          <a:p>
+            <a:pPr algn="ctr"/>
+          </a:p>
+        </p:txBody>
+      </p:sp>
+      <p:sp>
+        <p:nvSpPr>
+          <p:cNvPr id="43" name="Rectangle 42"/>
+          <p:cNvSpPr/>
+          <p:nvPr/>
+        </p:nvSpPr>
+        <p:spPr>
+          <a:xfrm>
+            <a:off x="5248656" y="2523744"/>
+            <a:ext cx="1508760" cy="1350000"/>
+          </a:xfrm>
+          <a:prstGeom prst="rect">
+            <a:avLst/>
+          </a:prstGeom>
+          <a:solidFill>
+            <a:srgbClr val="181208"/>
+          </a:solidFill>
+          <a:ln w="22860">
+            <a:solidFill>
+              <a:srgbClr val="FFDD44"/>
+            </a:solidFill>
+          </a:ln>
+        </p:spPr>
+        <p:style>
+          <a:lnRef idx="1">
+            <a:schemeClr val="accent1"/>
+          </a:lnRef>
+          <a:fillRef idx="3">
+            <a:schemeClr val="accent1"/>
+          </a:fillRef>
+          <a:effectRef idx="2">
+            <a:schemeClr val="accent1"/>
+          </a:effectRef>
+          <a:fontRef idx="minor">
+            <a:schemeClr val="lt1"/>
+          </a:fontRef>
+        </p:style>
+        <p:txBody>
+          <a:bodyPr rtlCol="0" anchor="ctr"/>
+          <a:lstStyle/>
+          <a:p>
+            <a:pPr algn="ctr"/>
+          </a:p>
+        </p:txBody>
+      </p:sp>
+      <p:sp>
+        <p:nvSpPr>
+          <p:cNvPr id="44" name="TextBox 43"/>
+          <p:cNvSpPr txBox="1"/>
+          <p:nvPr/>
+        </p:nvSpPr>
+        <p:spPr>
+          <a:xfrm>
+            <a:off x="5283656" y="2603744"/>
+            <a:ext cx="1448760" cy="390000"/>
+          </a:xfrm>
+          <a:prstGeom prst="rect">
+            <a:avLst/>
+          </a:prstGeom>
+          <a:noFill/>
+        </p:spPr>
+        <p:txBody>
+          <a:bodyPr wrap="square">
+            <a:spAutoFit/>
+          </a:bodyPr>
+          <a:lstStyle/>
+          <a:p>
+            <a:pPr algn="ctr"/>
+            <a:r>
+              <a:rPr sz="950" b="1">
+                <a:solidFill>
+                  <a:srgbClr val="FFDD44"/>
+                </a:solidFill>
+                <a:latin typeface="游明朝"/>
+              </a:rPr>
+              <a:t>エンディング
+(10頭討伐)</a:t>
+            </a:r>
+          </a:p>
+        </p:txBody>
+      </p:sp>
+      <p:sp>
+        <p:nvSpPr>
+          <p:cNvPr id="45" name="TextBox 44"/>
+          <p:cNvSpPr txBox="1"/>
+          <p:nvPr/>
+        </p:nvSpPr>
+        <p:spPr>
+          <a:xfrm>
+            <a:off x="5273656" y="3043744"/>
+            <a:ext cx="1463760" cy="760000"/>
+          </a:xfrm>
+          <a:prstGeom prst="rect">
+            <a:avLst/>
+          </a:prstGeom>
+          <a:noFill/>
+        </p:spPr>
+        <p:txBody>
+          <a:bodyPr wrap="square">
+            <a:spAutoFit/>
+          </a:bodyPr>
+          <a:lstStyle/>
+          <a:p>
+            <a:pPr algn="ctr"/>
+            <a:r>
+              <a:rPr sz="750" b="0">
+                <a:solidFill>
+                  <a:srgbClr val="999080"/>
+                </a:solidFill>
+                <a:latin typeface="メイリオ"/>
+              </a:rPr>
+              <a:t>10頭討伐達成で
+百竜ノ淵源
+チャレンジへ</a:t>
+            </a:r>
+          </a:p>
+        </p:txBody>
+      </p:sp>
+      <p:sp>
+        <p:nvSpPr>
+          <p:cNvPr id="46" name="Can 45"/>
+          <p:cNvSpPr/>
+          <p:nvPr/>
+        </p:nvSpPr>
+        <p:spPr>
+          <a:xfrm>
+            <a:off x="6767416" y="3108744"/>
+            <a:ext cx="200000" cy="180000"/>
+          </a:xfrm>
+          <a:prstGeom prst="can">
+            <a:avLst/>
+          </a:prstGeom>
+          <a:solidFill>
+            <a:srgbClr val="CCAA22"/>
+          </a:solidFill>
+          <a:ln>
+            <a:noFill/>
+          </a:ln>
+        </p:spPr>
+        <p:style>
+          <a:lnRef idx="1">
+            <a:schemeClr val="accent1"/>
+          </a:lnRef>
+          <a:fillRef idx="3">
+            <a:schemeClr val="accent1"/>
+          </a:fillRef>
+          <a:effectRef idx="2">
+            <a:schemeClr val="accent1"/>
+          </a:effectRef>
+          <a:fontRef idx="minor">
+            <a:schemeClr val="lt1"/>
+          </a:fontRef>
+        </p:style>
+        <p:txBody>
+          <a:bodyPr rtlCol="0" anchor="ctr"/>
+          <a:lstStyle/>
+          <a:p>
+            <a:pPr algn="ctr"/>
+          </a:p>
+        </p:txBody>
+      </p:sp>
+      <p:sp>
+        <p:nvSpPr>
+          <p:cNvPr id="47" name="Rectangle 46"/>
+          <p:cNvSpPr/>
+          <p:nvPr/>
+        </p:nvSpPr>
+        <p:spPr>
+          <a:xfrm>
+            <a:off x="6912864" y="2523744"/>
+            <a:ext cx="1508760" cy="1350000"/>
+          </a:xfrm>
+          <a:prstGeom prst="rect">
+            <a:avLst/>
+          </a:prstGeom>
+          <a:solidFill>
+            <a:srgbClr val="141002"/>
           </a:solidFill>
           <a:ln w="22860">
             <a:solidFill>
@@ -5657,14 +6575,14 @@
       </p:sp>
       <p:sp>
         <p:nvSpPr>
-          <p:cNvPr id="25" name="TextBox 24"/>
-          <p:cNvSpPr txBox="1"/>
-          <p:nvPr/>
-        </p:nvSpPr>
-        <p:spPr>
-          <a:xfrm>
-            <a:off x="6728408" y="755800"/>
-            <a:ext cx="1421328" cy="360000"/>
+          <p:cNvPr id="48" name="TextBox 47"/>
+          <p:cNvSpPr txBox="1"/>
+          <p:nvPr/>
+        </p:nvSpPr>
+        <p:spPr>
+          <a:xfrm>
+            <a:off x="6947864" y="2603744"/>
+            <a:ext cx="1448760" cy="390000"/>
           </a:xfrm>
           <a:prstGeom prst="rect">
             <a:avLst/>
@@ -5685,22 +6603,22 @@
                 </a:solidFill>
                 <a:latin typeface="游明朝"/>
               </a:rPr>
-              <a:t>剥ぎ取り
-チャンス</a:t>
-            </a:r>
-          </a:p>
-        </p:txBody>
-      </p:sp>
-      <p:sp>
-        <p:nvSpPr>
-          <p:cNvPr id="26" name="TextBox 25"/>
-          <p:cNvSpPr txBox="1"/>
-          <p:nvPr/>
-        </p:nvSpPr>
-        <p:spPr>
-          <a:xfrm>
-            <a:off x="6718408" y="1165800"/>
-            <a:ext cx="1436328" cy="520000"/>
+              <a:t>気焔万丈
+(上位AT)</a:t>
+            </a:r>
+          </a:p>
+        </p:txBody>
+      </p:sp>
+      <p:sp>
+        <p:nvSpPr>
+          <p:cNvPr id="49" name="TextBox 48"/>
+          <p:cNvSpPr txBox="1"/>
+          <p:nvPr/>
+        </p:nvSpPr>
+        <p:spPr>
+          <a:xfrm>
+            <a:off x="6937864" y="3043744"/>
+            <a:ext cx="1463760" cy="760000"/>
           </a:xfrm>
           <a:prstGeom prst="rect">
             <a:avLst/>
@@ -5721,23 +6639,23 @@
                 </a:solidFill>
                 <a:latin typeface="メイリオ"/>
               </a:rPr>
-              <a:t>討伐後の報酬タイム
-銀/金/G/超の4種
-金以上でストック確定</a:t>
-            </a:r>
-          </a:p>
-        </p:txBody>
-      </p:sp>
-      <p:sp>
-        <p:nvSpPr>
-          <p:cNvPr id="27" name="TextBox 26"/>
-          <p:cNvSpPr txBox="1"/>
-          <p:nvPr/>
-        </p:nvSpPr>
-        <p:spPr>
-          <a:xfrm>
-            <a:off x="256032" y="1805800"/>
-            <a:ext cx="3200400" cy="260000"/>
+              <a:t>百竜ノ淵源BONUS
+成功(約72%)で突入
+全ボーナス純増UP</a:t>
+            </a:r>
+          </a:p>
+        </p:txBody>
+      </p:sp>
+      <p:sp>
+        <p:nvSpPr>
+          <p:cNvPr id="50" name="TextBox 49"/>
+          <p:cNvSpPr txBox="1"/>
+          <p:nvPr/>
+        </p:nvSpPr>
+        <p:spPr>
+          <a:xfrm>
+            <a:off x="256032" y="3893744"/>
+            <a:ext cx="3474720" cy="250000"/>
           </a:xfrm>
           <a:prstGeom prst="rect">
             <a:avLst/>
@@ -5754,31 +6672,31 @@
             <a:r>
               <a:rPr sz="750" b="0">
                 <a:solidFill>
-                  <a:srgbClr val="22CCDD"/>
+                  <a:srgbClr val="FF8800"/>
                 </a:solidFill>
                 <a:latin typeface="メイリオ"/>
               </a:rPr>
-              <a:t>天井：リプレイ規定5セット目（累計200回）でCZ確定</a:t>
-            </a:r>
-          </a:p>
-        </p:txBody>
-      </p:sp>
-      <p:sp>
-        <p:nvSpPr>
-          <p:cNvPr id="28" name="Rectangle 27"/>
+              <a:t>↺ 討伐失敗+ストックあり→集会所に戻り何度でも継続</a:t>
+            </a:r>
+          </a:p>
+        </p:txBody>
+      </p:sp>
+      <p:sp>
+        <p:nvSpPr>
+          <p:cNvPr id="51" name="Rectangle 50"/>
           <p:cNvSpPr/>
           <p:nvPr/>
         </p:nvSpPr>
         <p:spPr>
           <a:xfrm>
-            <a:off x="256032" y="2045800"/>
+            <a:off x="256032" y="4123744"/>
             <a:ext cx="3474720" cy="5000"/>
           </a:xfrm>
           <a:prstGeom prst="rect">
             <a:avLst/>
           </a:prstGeom>
           <a:solidFill>
-            <a:srgbClr val="22CCDD"/>
+            <a:srgbClr val="FF8800"/>
           </a:solidFill>
           <a:ln>
             <a:noFill/>
@@ -5808,55 +6726,55 @@
       </p:sp>
       <p:sp>
         <p:nvSpPr>
-          <p:cNvPr id="29" name="TextBox 28"/>
-          <p:cNvSpPr txBox="1"/>
-          <p:nvPr/>
-        </p:nvSpPr>
-        <p:spPr>
-          <a:xfrm>
-            <a:off x="3913632" y="1805800"/>
-            <a:ext cx="3200400" cy="260000"/>
-          </a:xfrm>
-          <a:prstGeom prst="rect">
-            <a:avLst/>
-          </a:prstGeom>
-          <a:noFill/>
-        </p:spPr>
-        <p:txBody>
-          <a:bodyPr wrap="square">
-            <a:spAutoFit/>
-          </a:bodyPr>
-          <a:lstStyle/>
-          <a:p>
-            <a:pPr algn="l"/>
-            <a:r>
-              <a:rPr sz="750" b="0">
-                <a:solidFill>
-                  <a:srgbClr val="CCAA22"/>
+          <p:cNvPr id="52" name="TextBox 51"/>
+          <p:cNvSpPr txBox="1"/>
+          <p:nvPr/>
+        </p:nvSpPr>
+        <p:spPr>
+          <a:xfrm>
+            <a:off x="6675120" y="4919472"/>
+            <a:ext cx="2377440" cy="180000"/>
+          </a:xfrm>
+          <a:prstGeom prst="rect">
+            <a:avLst/>
+          </a:prstGeom>
+          <a:noFill/>
+        </p:spPr>
+        <p:txBody>
+          <a:bodyPr wrap="square">
+            <a:spAutoFit/>
+          </a:bodyPr>
+          <a:lstStyle/>
+          <a:p>
+            <a:pPr algn="r"/>
+            <a:r>
+              <a:rPr sz="650" b="0">
+                <a:solidFill>
+                  <a:srgbClr val="999080"/>
                 </a:solidFill>
                 <a:latin typeface="メイリオ"/>
               </a:rPr>
-              <a:t>有利区間差枚+2100枚到達→エンディング→上位AT抽選</a:t>
-            </a:r>
-          </a:p>
-        </p:txBody>
-      </p:sp>
-      <p:sp>
-        <p:nvSpPr>
-          <p:cNvPr id="30" name="Rectangle 29"/>
+              <a:t>※ネット解析情報より（ちょんぼりすた・なな徹・一撃・pachiseven）</a:t>
+            </a:r>
+          </a:p>
+        </p:txBody>
+      </p:sp>
+      <p:sp>
+        <p:nvSpPr>
+          <p:cNvPr id="53" name="Rectangle 52"/>
           <p:cNvSpPr/>
           <p:nvPr/>
         </p:nvSpPr>
         <p:spPr>
           <a:xfrm>
-            <a:off x="0" y="1938528"/>
-            <a:ext cx="9144000" cy="5000"/>
-          </a:xfrm>
-          <a:prstGeom prst="rect">
-            <a:avLst/>
-          </a:prstGeom>
-          <a:solidFill>
-            <a:srgbClr val="305018"/>
+            <a:off x="0" y="4645152"/>
+            <a:ext cx="9144000" cy="498348"/>
+          </a:xfrm>
+          <a:prstGeom prst="rect">
+            <a:avLst/>
+          </a:prstGeom>
+          <a:solidFill>
+            <a:srgbClr val="100C04"/>
           </a:solidFill>
           <a:ln>
             <a:noFill/>
@@ -5886,25 +6804,23 @@
       </p:sp>
       <p:sp>
         <p:nvSpPr>
-          <p:cNvPr id="31" name="Rectangle 30"/>
+          <p:cNvPr id="54" name="Rectangle 53"/>
           <p:cNvSpPr/>
           <p:nvPr/>
         </p:nvSpPr>
         <p:spPr>
           <a:xfrm>
-            <a:off x="256032" y="2011680"/>
-            <a:ext cx="1828800" cy="1080000"/>
-          </a:xfrm>
-          <a:prstGeom prst="rect">
-            <a:avLst/>
-          </a:prstGeom>
-          <a:solidFill>
-            <a:srgbClr val="181208"/>
-          </a:solidFill>
-          <a:ln w="22860">
-            <a:solidFill>
-              <a:srgbClr val="FF8800"/>
-            </a:solidFill>
+            <a:off x="0" y="4645152"/>
+            <a:ext cx="20000" cy="498348"/>
+          </a:xfrm>
+          <a:prstGeom prst="rect">
+            <a:avLst/>
+          </a:prstGeom>
+          <a:solidFill>
+            <a:srgbClr val="22AA44"/>
+          </a:solidFill>
+          <a:ln>
+            <a:noFill/>
           </a:ln>
         </p:spPr>
         <p:style>
@@ -5931,846 +6847,7 @@
       </p:sp>
       <p:sp>
         <p:nvSpPr>
-          <p:cNvPr id="32" name="TextBox 31"/>
-          <p:cNvSpPr txBox="1"/>
-          <p:nvPr/>
-        </p:nvSpPr>
-        <p:spPr>
-          <a:xfrm>
-            <a:off x="296032" y="2081680"/>
-            <a:ext cx="1758800" cy="370000"/>
-          </a:xfrm>
-          <a:prstGeom prst="rect">
-            <a:avLst/>
-          </a:prstGeom>
-          <a:noFill/>
-        </p:spPr>
-        <p:txBody>
-          <a:bodyPr wrap="square">
-            <a:spAutoFit/>
-          </a:bodyPr>
-          <a:lstStyle/>
-          <a:p>
-            <a:pPr algn="ctr"/>
-            <a:r>
-              <a:rPr sz="1000" b="1">
-                <a:solidFill>
-                  <a:srgbClr val="FF8800"/>
-                </a:solidFill>
-                <a:latin typeface="游明朝"/>
-              </a:rPr>
-              <a:t>狩猟ボーナス
-（基本AT）</a:t>
-            </a:r>
-          </a:p>
-        </p:txBody>
-      </p:sp>
-      <p:sp>
-        <p:nvSpPr>
-          <p:cNvPr id="33" name="TextBox 32"/>
-          <p:cNvSpPr txBox="1"/>
-          <p:nvPr/>
-        </p:nvSpPr>
-        <p:spPr>
-          <a:xfrm>
-            <a:off x="286032" y="2501680"/>
-            <a:ext cx="1773800" cy="470000"/>
-          </a:xfrm>
-          <a:prstGeom prst="rect">
-            <a:avLst/>
-          </a:prstGeom>
-          <a:noFill/>
-        </p:spPr>
-        <p:txBody>
-          <a:bodyPr wrap="square">
-            <a:spAutoFit/>
-          </a:bodyPr>
-          <a:lstStyle/>
-          <a:p>
-            <a:pPr algn="ctr"/>
-            <a:r>
-              <a:rPr sz="750" b="0">
-                <a:solidFill>
-                  <a:srgbClr val="999080"/>
-                </a:solidFill>
-                <a:latin typeface="メイリオ"/>
-              </a:rPr>
-              <a:t>純増約2.7枚/G
-モンスターと戦闘
-討伐率約52%</a:t>
-            </a:r>
-          </a:p>
-        </p:txBody>
-      </p:sp>
-      <p:sp>
-        <p:nvSpPr>
-          <p:cNvPr id="34" name="Can 33"/>
-          <p:cNvSpPr/>
-          <p:nvPr/>
-        </p:nvSpPr>
-        <p:spPr>
-          <a:xfrm>
-            <a:off x="2096832" y="2461680"/>
-            <a:ext cx="200000" cy="180000"/>
-          </a:xfrm>
-          <a:prstGeom prst="can">
-            <a:avLst/>
-          </a:prstGeom>
-          <a:solidFill>
-            <a:srgbClr val="CCAA22"/>
-          </a:solidFill>
-          <a:ln>
-            <a:noFill/>
-          </a:ln>
-        </p:spPr>
-        <p:style>
-          <a:lnRef idx="1">
-            <a:schemeClr val="accent1"/>
-          </a:lnRef>
-          <a:fillRef idx="3">
-            <a:schemeClr val="accent1"/>
-          </a:fillRef>
-          <a:effectRef idx="2">
-            <a:schemeClr val="accent1"/>
-          </a:effectRef>
-          <a:fontRef idx="minor">
-            <a:schemeClr val="lt1"/>
-          </a:fontRef>
-        </p:style>
-        <p:txBody>
-          <a:bodyPr rtlCol="0" anchor="ctr"/>
-          <a:lstStyle/>
-          <a:p>
-            <a:pPr algn="ctr"/>
-          </a:p>
-        </p:txBody>
-      </p:sp>
-      <p:sp>
-        <p:nvSpPr>
-          <p:cNvPr id="35" name="Rectangle 34"/>
-          <p:cNvSpPr/>
-          <p:nvPr/>
-        </p:nvSpPr>
-        <p:spPr>
-          <a:xfrm>
-            <a:off x="2286000" y="2011680"/>
-            <a:ext cx="1828800" cy="1080000"/>
-          </a:xfrm>
-          <a:prstGeom prst="rect">
-            <a:avLst/>
-          </a:prstGeom>
-          <a:solidFill>
-            <a:srgbClr val="181208"/>
-          </a:solidFill>
-          <a:ln w="22860">
-            <a:solidFill>
-              <a:srgbClr val="22AA44"/>
-            </a:solidFill>
-          </a:ln>
-        </p:spPr>
-        <p:style>
-          <a:lnRef idx="1">
-            <a:schemeClr val="accent1"/>
-          </a:lnRef>
-          <a:fillRef idx="3">
-            <a:schemeClr val="accent1"/>
-          </a:fillRef>
-          <a:effectRef idx="2">
-            <a:schemeClr val="accent1"/>
-          </a:effectRef>
-          <a:fontRef idx="minor">
-            <a:schemeClr val="lt1"/>
-          </a:fontRef>
-        </p:style>
-        <p:txBody>
-          <a:bodyPr rtlCol="0" anchor="ctr"/>
-          <a:lstStyle/>
-          <a:p>
-            <a:pPr algn="ctr"/>
-          </a:p>
-        </p:txBody>
-      </p:sp>
-      <p:sp>
-        <p:nvSpPr>
-          <p:cNvPr id="36" name="TextBox 35"/>
-          <p:cNvSpPr txBox="1"/>
-          <p:nvPr/>
-        </p:nvSpPr>
-        <p:spPr>
-          <a:xfrm>
-            <a:off x="2326000" y="2081680"/>
-            <a:ext cx="1758800" cy="370000"/>
-          </a:xfrm>
-          <a:prstGeom prst="rect">
-            <a:avLst/>
-          </a:prstGeom>
-          <a:noFill/>
-        </p:spPr>
-        <p:txBody>
-          <a:bodyPr wrap="square">
-            <a:spAutoFit/>
-          </a:bodyPr>
-          <a:lstStyle/>
-          <a:p>
-            <a:pPr algn="ctr"/>
-            <a:r>
-              <a:rPr sz="1000" b="1">
-                <a:solidFill>
-                  <a:srgbClr val="22AA44"/>
-                </a:solidFill>
-                <a:latin typeface="游明朝"/>
-              </a:rPr>
-              <a:t>百竜刀
--千変万化MODE-</a:t>
-            </a:r>
-          </a:p>
-        </p:txBody>
-      </p:sp>
-      <p:sp>
-        <p:nvSpPr>
-          <p:cNvPr id="37" name="TextBox 36"/>
-          <p:cNvSpPr txBox="1"/>
-          <p:nvPr/>
-        </p:nvSpPr>
-        <p:spPr>
-          <a:xfrm>
-            <a:off x="2316000" y="2501680"/>
-            <a:ext cx="1773800" cy="470000"/>
-          </a:xfrm>
-          <a:prstGeom prst="rect">
-            <a:avLst/>
-          </a:prstGeom>
-          <a:noFill/>
-        </p:spPr>
-        <p:txBody>
-          <a:bodyPr wrap="square">
-            <a:spAutoFit/>
-          </a:bodyPr>
-          <a:lstStyle/>
-          <a:p>
-            <a:pPr algn="ctr"/>
-            <a:r>
-              <a:rPr sz="750" b="0">
-                <a:solidFill>
-                  <a:srgbClr val="999080"/>
-                </a:solidFill>
-                <a:latin typeface="メイリオ"/>
-              </a:rPr>
-              <a:t>早期討伐時突入
-ボーナスストック
-特化ゾーン</a:t>
-            </a:r>
-          </a:p>
-        </p:txBody>
-      </p:sp>
-      <p:sp>
-        <p:nvSpPr>
-          <p:cNvPr id="38" name="Can 37"/>
-          <p:cNvSpPr/>
-          <p:nvPr/>
-        </p:nvSpPr>
-        <p:spPr>
-          <a:xfrm>
-            <a:off x="4126800" y="2461680"/>
-            <a:ext cx="200000" cy="180000"/>
-          </a:xfrm>
-          <a:prstGeom prst="can">
-            <a:avLst/>
-          </a:prstGeom>
-          <a:solidFill>
-            <a:srgbClr val="CCAA22"/>
-          </a:solidFill>
-          <a:ln>
-            <a:noFill/>
-          </a:ln>
-        </p:spPr>
-        <p:style>
-          <a:lnRef idx="1">
-            <a:schemeClr val="accent1"/>
-          </a:lnRef>
-          <a:fillRef idx="3">
-            <a:schemeClr val="accent1"/>
-          </a:fillRef>
-          <a:effectRef idx="2">
-            <a:schemeClr val="accent1"/>
-          </a:effectRef>
-          <a:fontRef idx="minor">
-            <a:schemeClr val="lt1"/>
-          </a:fontRef>
-        </p:style>
-        <p:txBody>
-          <a:bodyPr rtlCol="0" anchor="ctr"/>
-          <a:lstStyle/>
-          <a:p>
-            <a:pPr algn="ctr"/>
-          </a:p>
-        </p:txBody>
-      </p:sp>
-      <p:sp>
-        <p:nvSpPr>
-          <p:cNvPr id="39" name="Rectangle 38"/>
-          <p:cNvSpPr/>
-          <p:nvPr/>
-        </p:nvSpPr>
-        <p:spPr>
-          <a:xfrm>
-            <a:off x="4315968" y="2011680"/>
-            <a:ext cx="1828800" cy="1080000"/>
-          </a:xfrm>
-          <a:prstGeom prst="rect">
-            <a:avLst/>
-          </a:prstGeom>
-          <a:solidFill>
-            <a:srgbClr val="181208"/>
-          </a:solidFill>
-          <a:ln w="22860">
-            <a:solidFill>
-              <a:srgbClr val="FFDD44"/>
-            </a:solidFill>
-          </a:ln>
-        </p:spPr>
-        <p:style>
-          <a:lnRef idx="1">
-            <a:schemeClr val="accent1"/>
-          </a:lnRef>
-          <a:fillRef idx="3">
-            <a:schemeClr val="accent1"/>
-          </a:fillRef>
-          <a:effectRef idx="2">
-            <a:schemeClr val="accent1"/>
-          </a:effectRef>
-          <a:fontRef idx="minor">
-            <a:schemeClr val="lt1"/>
-          </a:fontRef>
-        </p:style>
-        <p:txBody>
-          <a:bodyPr rtlCol="0" anchor="ctr"/>
-          <a:lstStyle/>
-          <a:p>
-            <a:pPr algn="ctr"/>
-          </a:p>
-        </p:txBody>
-      </p:sp>
-      <p:sp>
-        <p:nvSpPr>
-          <p:cNvPr id="40" name="TextBox 39"/>
-          <p:cNvSpPr txBox="1"/>
-          <p:nvPr/>
-        </p:nvSpPr>
-        <p:spPr>
-          <a:xfrm>
-            <a:off x="4355968" y="2081680"/>
-            <a:ext cx="1758800" cy="370000"/>
-          </a:xfrm>
-          <a:prstGeom prst="rect">
-            <a:avLst/>
-          </a:prstGeom>
-          <a:noFill/>
-        </p:spPr>
-        <p:txBody>
-          <a:bodyPr wrap="square">
-            <a:spAutoFit/>
-          </a:bodyPr>
-          <a:lstStyle/>
-          <a:p>
-            <a:pPr algn="ctr"/>
-            <a:r>
-              <a:rPr sz="1000" b="1">
-                <a:solidFill>
-                  <a:srgbClr val="FFDD44"/>
-                </a:solidFill>
-                <a:latin typeface="游明朝"/>
-              </a:rPr>
-              <a:t>エンディング
-(10頭討伐)</a:t>
-            </a:r>
-          </a:p>
-        </p:txBody>
-      </p:sp>
-      <p:sp>
-        <p:nvSpPr>
-          <p:cNvPr id="41" name="TextBox 40"/>
-          <p:cNvSpPr txBox="1"/>
-          <p:nvPr/>
-        </p:nvSpPr>
-        <p:spPr>
-          <a:xfrm>
-            <a:off x="4345968" y="2501680"/>
-            <a:ext cx="1773800" cy="470000"/>
-          </a:xfrm>
-          <a:prstGeom prst="rect">
-            <a:avLst/>
-          </a:prstGeom>
-          <a:noFill/>
-        </p:spPr>
-        <p:txBody>
-          <a:bodyPr wrap="square">
-            <a:spAutoFit/>
-          </a:bodyPr>
-          <a:lstStyle/>
-          <a:p>
-            <a:pPr algn="ctr"/>
-            <a:r>
-              <a:rPr sz="750" b="0">
-                <a:solidFill>
-                  <a:srgbClr val="999080"/>
-                </a:solidFill>
-                <a:latin typeface="メイリオ"/>
-              </a:rPr>
-              <a:t>規定10頭討伐で
-突入する特殊フェーズ
-上位AT抽選の起点</a:t>
-            </a:r>
-          </a:p>
-        </p:txBody>
-      </p:sp>
-      <p:sp>
-        <p:nvSpPr>
-          <p:cNvPr id="42" name="Can 41"/>
-          <p:cNvSpPr/>
-          <p:nvPr/>
-        </p:nvSpPr>
-        <p:spPr>
-          <a:xfrm>
-            <a:off x="6156768" y="2461680"/>
-            <a:ext cx="200000" cy="180000"/>
-          </a:xfrm>
-          <a:prstGeom prst="can">
-            <a:avLst/>
-          </a:prstGeom>
-          <a:solidFill>
-            <a:srgbClr val="CCAA22"/>
-          </a:solidFill>
-          <a:ln>
-            <a:noFill/>
-          </a:ln>
-        </p:spPr>
-        <p:style>
-          <a:lnRef idx="1">
-            <a:schemeClr val="accent1"/>
-          </a:lnRef>
-          <a:fillRef idx="3">
-            <a:schemeClr val="accent1"/>
-          </a:fillRef>
-          <a:effectRef idx="2">
-            <a:schemeClr val="accent1"/>
-          </a:effectRef>
-          <a:fontRef idx="minor">
-            <a:schemeClr val="lt1"/>
-          </a:fontRef>
-        </p:style>
-        <p:txBody>
-          <a:bodyPr rtlCol="0" anchor="ctr"/>
-          <a:lstStyle/>
-          <a:p>
-            <a:pPr algn="ctr"/>
-          </a:p>
-        </p:txBody>
-      </p:sp>
-      <p:sp>
-        <p:nvSpPr>
-          <p:cNvPr id="43" name="Rectangle 42"/>
-          <p:cNvSpPr/>
-          <p:nvPr/>
-        </p:nvSpPr>
-        <p:spPr>
-          <a:xfrm>
-            <a:off x="6345936" y="2011680"/>
-            <a:ext cx="1828800" cy="1080000"/>
-          </a:xfrm>
-          <a:prstGeom prst="rect">
-            <a:avLst/>
-          </a:prstGeom>
-          <a:solidFill>
-            <a:srgbClr val="141002"/>
-          </a:solidFill>
-          <a:ln w="22860">
-            <a:solidFill>
-              <a:srgbClr val="CCAA22"/>
-            </a:solidFill>
-          </a:ln>
-        </p:spPr>
-        <p:style>
-          <a:lnRef idx="1">
-            <a:schemeClr val="accent1"/>
-          </a:lnRef>
-          <a:fillRef idx="3">
-            <a:schemeClr val="accent1"/>
-          </a:fillRef>
-          <a:effectRef idx="2">
-            <a:schemeClr val="accent1"/>
-          </a:effectRef>
-          <a:fontRef idx="minor">
-            <a:schemeClr val="lt1"/>
-          </a:fontRef>
-        </p:style>
-        <p:txBody>
-          <a:bodyPr rtlCol="0" anchor="ctr"/>
-          <a:lstStyle/>
-          <a:p>
-            <a:pPr algn="ctr"/>
-          </a:p>
-        </p:txBody>
-      </p:sp>
-      <p:sp>
-        <p:nvSpPr>
-          <p:cNvPr id="44" name="TextBox 43"/>
-          <p:cNvSpPr txBox="1"/>
-          <p:nvPr/>
-        </p:nvSpPr>
-        <p:spPr>
-          <a:xfrm>
-            <a:off x="6385936" y="2081680"/>
-            <a:ext cx="1758800" cy="370000"/>
-          </a:xfrm>
-          <a:prstGeom prst="rect">
-            <a:avLst/>
-          </a:prstGeom>
-          <a:noFill/>
-        </p:spPr>
-        <p:txBody>
-          <a:bodyPr wrap="square">
-            <a:spAutoFit/>
-          </a:bodyPr>
-          <a:lstStyle/>
-          <a:p>
-            <a:pPr algn="ctr"/>
-            <a:r>
-              <a:rPr sz="1000" b="1">
-                <a:solidFill>
-                  <a:srgbClr val="CCAA22"/>
-                </a:solidFill>
-                <a:latin typeface="游明朝"/>
-              </a:rPr>
-              <a:t>気焔万丈
-（上位AT）</a:t>
-            </a:r>
-          </a:p>
-        </p:txBody>
-      </p:sp>
-      <p:sp>
-        <p:nvSpPr>
-          <p:cNvPr id="45" name="TextBox 44"/>
-          <p:cNvSpPr txBox="1"/>
-          <p:nvPr/>
-        </p:nvSpPr>
-        <p:spPr>
-          <a:xfrm>
-            <a:off x="6375936" y="2501680"/>
-            <a:ext cx="1773800" cy="470000"/>
-          </a:xfrm>
-          <a:prstGeom prst="rect">
-            <a:avLst/>
-          </a:prstGeom>
-          <a:noFill/>
-        </p:spPr>
-        <p:txBody>
-          <a:bodyPr wrap="square">
-            <a:spAutoFit/>
-          </a:bodyPr>
-          <a:lstStyle/>
-          <a:p>
-            <a:pPr algn="ctr"/>
-            <a:r>
-              <a:rPr sz="750" b="0">
-                <a:solidFill>
-                  <a:srgbClr val="999080"/>
-                </a:solidFill>
-                <a:latin typeface="メイリオ"/>
-              </a:rPr>
-              <a:t>純増約4.0枚/G
-通常ATと同ゲーム性
-百竜ノ淵源経由</a:t>
-            </a:r>
-          </a:p>
-        </p:txBody>
-      </p:sp>
-      <p:sp>
-        <p:nvSpPr>
-          <p:cNvPr id="46" name="Rectangle 45"/>
-          <p:cNvSpPr/>
-          <p:nvPr/>
-        </p:nvSpPr>
-        <p:spPr>
-          <a:xfrm>
-            <a:off x="8375904" y="2011680"/>
-            <a:ext cx="1298448" cy="1080000"/>
-          </a:xfrm>
-          <a:prstGeom prst="rect">
-            <a:avLst/>
-          </a:prstGeom>
-          <a:solidFill>
-            <a:srgbClr val="181208"/>
-          </a:solidFill>
-          <a:ln w="19050">
-            <a:solidFill>
-              <a:srgbClr val="22CCDD"/>
-            </a:solidFill>
-          </a:ln>
-        </p:spPr>
-        <p:style>
-          <a:lnRef idx="1">
-            <a:schemeClr val="accent1"/>
-          </a:lnRef>
-          <a:fillRef idx="3">
-            <a:schemeClr val="accent1"/>
-          </a:fillRef>
-          <a:effectRef idx="2">
-            <a:schemeClr val="accent1"/>
-          </a:effectRef>
-          <a:fontRef idx="minor">
-            <a:schemeClr val="lt1"/>
-          </a:fontRef>
-        </p:style>
-        <p:txBody>
-          <a:bodyPr rtlCol="0" anchor="ctr"/>
-          <a:lstStyle/>
-          <a:p>
-            <a:pPr algn="ctr"/>
-          </a:p>
-        </p:txBody>
-      </p:sp>
-      <p:sp>
-        <p:nvSpPr>
-          <p:cNvPr id="47" name="Rectangle 46"/>
-          <p:cNvSpPr/>
-          <p:nvPr/>
-        </p:nvSpPr>
-        <p:spPr>
-          <a:xfrm>
-            <a:off x="8375904" y="2011680"/>
-            <a:ext cx="30000" cy="1080000"/>
-          </a:xfrm>
-          <a:prstGeom prst="rect">
-            <a:avLst/>
-          </a:prstGeom>
-          <a:solidFill>
-            <a:srgbClr val="22CCDD"/>
-          </a:solidFill>
-          <a:ln>
-            <a:noFill/>
-          </a:ln>
-        </p:spPr>
-        <p:style>
-          <a:lnRef idx="1">
-            <a:schemeClr val="accent1"/>
-          </a:lnRef>
-          <a:fillRef idx="3">
-            <a:schemeClr val="accent1"/>
-          </a:fillRef>
-          <a:effectRef idx="2">
-            <a:schemeClr val="accent1"/>
-          </a:effectRef>
-          <a:fontRef idx="minor">
-            <a:schemeClr val="lt1"/>
-          </a:fontRef>
-        </p:style>
-        <p:txBody>
-          <a:bodyPr rtlCol="0" anchor="ctr"/>
-          <a:lstStyle/>
-          <a:p>
-            <a:pPr algn="ctr"/>
-          </a:p>
-        </p:txBody>
-      </p:sp>
-      <p:sp>
-        <p:nvSpPr>
-          <p:cNvPr id="48" name="TextBox 47"/>
-          <p:cNvSpPr txBox="1"/>
-          <p:nvPr/>
-        </p:nvSpPr>
-        <p:spPr>
-          <a:xfrm>
-            <a:off x="8425904" y="2081680"/>
-            <a:ext cx="1097280" cy="310000"/>
-          </a:xfrm>
-          <a:prstGeom prst="rect">
-            <a:avLst/>
-          </a:prstGeom>
-          <a:noFill/>
-        </p:spPr>
-        <p:txBody>
-          <a:bodyPr wrap="square">
-            <a:spAutoFit/>
-          </a:bodyPr>
-          <a:lstStyle/>
-          <a:p>
-            <a:pPr algn="ctr"/>
-            <a:r>
-              <a:rPr sz="900" b="1">
-                <a:solidFill>
-                  <a:srgbClr val="22CCDD"/>
-                </a:solidFill>
-                <a:latin typeface="游明朝"/>
-              </a:rPr>
-              <a:t>百竜ノ
-淵源
-BONUS</a:t>
-            </a:r>
-          </a:p>
-        </p:txBody>
-      </p:sp>
-      <p:sp>
-        <p:nvSpPr>
-          <p:cNvPr id="49" name="TextBox 48"/>
-          <p:cNvSpPr txBox="1"/>
-          <p:nvPr/>
-        </p:nvSpPr>
-        <p:spPr>
-          <a:xfrm>
-            <a:off x="8425904" y="2501680"/>
-            <a:ext cx="1097280" cy="460000"/>
-          </a:xfrm>
-          <a:prstGeom prst="rect">
-            <a:avLst/>
-          </a:prstGeom>
-          <a:noFill/>
-        </p:spPr>
-        <p:txBody>
-          <a:bodyPr wrap="square">
-            <a:spAutoFit/>
-          </a:bodyPr>
-          <a:lstStyle/>
-          <a:p>
-            <a:pPr algn="ctr"/>
-            <a:r>
-              <a:rPr sz="750" b="0">
-                <a:solidFill>
-                  <a:srgbClr val="F0ECE0"/>
-                </a:solidFill>
-                <a:latin typeface="メイリオ"/>
-              </a:rPr>
-              <a:t>討伐成功
-(約72%)で
-気焔万丈へ</a:t>
-            </a:r>
-          </a:p>
-        </p:txBody>
-      </p:sp>
-      <p:sp>
-        <p:nvSpPr>
-          <p:cNvPr id="50" name="TextBox 49"/>
-          <p:cNvSpPr txBox="1"/>
-          <p:nvPr/>
-        </p:nvSpPr>
-        <p:spPr>
-          <a:xfrm>
-            <a:off x="6675120" y="4919472"/>
-            <a:ext cx="2377440" cy="180000"/>
-          </a:xfrm>
-          <a:prstGeom prst="rect">
-            <a:avLst/>
-          </a:prstGeom>
-          <a:noFill/>
-        </p:spPr>
-        <p:txBody>
-          <a:bodyPr wrap="square">
-            <a:spAutoFit/>
-          </a:bodyPr>
-          <a:lstStyle/>
-          <a:p>
-            <a:pPr algn="r"/>
-            <a:r>
-              <a:rPr sz="650" b="0">
-                <a:solidFill>
-                  <a:srgbClr val="999080"/>
-                </a:solidFill>
-                <a:latin typeface="メイリオ"/>
-              </a:rPr>
-              <a:t>※ネット解析情報より（ちょんぼりすた・なな徹・一撃・pachiseven）</a:t>
-            </a:r>
-          </a:p>
-        </p:txBody>
-      </p:sp>
-      <p:sp>
-        <p:nvSpPr>
-          <p:cNvPr id="51" name="Rectangle 50"/>
-          <p:cNvSpPr/>
-          <p:nvPr/>
-        </p:nvSpPr>
-        <p:spPr>
-          <a:xfrm>
-            <a:off x="0" y="4645152"/>
-            <a:ext cx="9144000" cy="498348"/>
-          </a:xfrm>
-          <a:prstGeom prst="rect">
-            <a:avLst/>
-          </a:prstGeom>
-          <a:solidFill>
-            <a:srgbClr val="100C04"/>
-          </a:solidFill>
-          <a:ln>
-            <a:noFill/>
-          </a:ln>
-        </p:spPr>
-        <p:style>
-          <a:lnRef idx="1">
-            <a:schemeClr val="accent1"/>
-          </a:lnRef>
-          <a:fillRef idx="3">
-            <a:schemeClr val="accent1"/>
-          </a:fillRef>
-          <a:effectRef idx="2">
-            <a:schemeClr val="accent1"/>
-          </a:effectRef>
-          <a:fontRef idx="minor">
-            <a:schemeClr val="lt1"/>
-          </a:fontRef>
-        </p:style>
-        <p:txBody>
-          <a:bodyPr rtlCol="0" anchor="ctr"/>
-          <a:lstStyle/>
-          <a:p>
-            <a:pPr algn="ctr"/>
-          </a:p>
-        </p:txBody>
-      </p:sp>
-      <p:sp>
-        <p:nvSpPr>
-          <p:cNvPr id="52" name="Rectangle 51"/>
-          <p:cNvSpPr/>
-          <p:nvPr/>
-        </p:nvSpPr>
-        <p:spPr>
-          <a:xfrm>
-            <a:off x="0" y="4645152"/>
-            <a:ext cx="20000" cy="498348"/>
-          </a:xfrm>
-          <a:prstGeom prst="rect">
-            <a:avLst/>
-          </a:prstGeom>
-          <a:solidFill>
-            <a:srgbClr val="22AA44"/>
-          </a:solidFill>
-          <a:ln>
-            <a:noFill/>
-          </a:ln>
-        </p:spPr>
-        <p:style>
-          <a:lnRef idx="1">
-            <a:schemeClr val="accent1"/>
-          </a:lnRef>
-          <a:fillRef idx="3">
-            <a:schemeClr val="accent1"/>
-          </a:fillRef>
-          <a:effectRef idx="2">
-            <a:schemeClr val="accent1"/>
-          </a:effectRef>
-          <a:fontRef idx="minor">
-            <a:schemeClr val="lt1"/>
-          </a:fontRef>
-        </p:style>
-        <p:txBody>
-          <a:bodyPr rtlCol="0" anchor="ctr"/>
-          <a:lstStyle/>
-          <a:p>
-            <a:pPr algn="ctr"/>
-          </a:p>
-        </p:txBody>
-      </p:sp>
-      <p:sp>
-        <p:nvSpPr>
-          <p:cNvPr id="53" name="TextBox 52"/>
+          <p:cNvPr id="55" name="TextBox 54"/>
           <p:cNvSpPr txBox="1"/>
           <p:nvPr/>
         </p:nvSpPr>
@@ -6798,14 +6875,14 @@
                 </a:solidFill>
                 <a:latin typeface="メイリオ"/>
               </a:rPr>
-              <a:t>上段=通常〜狩猟ボーナス突入ルート（カムラPT・CZ・レア役直撃）、下段=AT内昇格ルート（討伐→エンディング→気焔万丈）</a:t>
-            </a:r>
-          </a:p>
-        </p:txBody>
-      </p:sp>
-      <p:sp>
-        <p:nvSpPr>
-          <p:cNvPr id="54" name="TextBox 53"/>
+              <a:t>上段=通常時3ルート（クエスト/だるま落とし/百竜夜行）＋レア役ライズゾーンでPT加速</a:t>
+            </a:r>
+          </a:p>
+        </p:txBody>
+      </p:sp>
+      <p:sp>
+        <p:nvSpPr>
+          <p:cNvPr id="56" name="TextBox 55"/>
           <p:cNvSpPr txBox="1"/>
           <p:nvPr/>
         </p:nvSpPr>
@@ -6833,7 +6910,7 @@
                 </a:solidFill>
                 <a:latin typeface="メイリオ"/>
               </a:rPr>
-              <a:t>討伐するたびに次の戦いが始まるモンハンサイクルがそのままスロットのAT継続設計に</a:t>
+              <a:t>下段=AT集会所ループ（討伐失敗でも継続）→10頭達成→百竜ノ淵源→気焔万丈へ昇格</a:t>
             </a:r>
           </a:p>
         </p:txBody>

--- a/proposals/機種分析/モンスターハンターライズ/mhrise_guide_v1.pptx
+++ b/proposals/機種分析/モンスターハンターライズ/mhrise_guide_v1.pptx
@@ -4884,7 +4884,7 @@
                 </a:solidFill>
                 <a:latin typeface="游明朝"/>
               </a:rPr>
-              <a:t>ゲームフロー全体図 ── 通常3ルート→AT集会所ループ→気焔万丈</a:t>
+              <a:t>ゲームフロー全体図 ── 2カウンター並行→AT集会所ループ→気焔万丈</a:t>
             </a:r>
           </a:p>
         </p:txBody>
@@ -4976,7 +4976,7 @@
         <p:spPr>
           <a:xfrm>
             <a:off x="256032" y="685800"/>
-            <a:ext cx="1417320" cy="1350000"/>
+            <a:ext cx="1097280" cy="1680000"/>
           </a:xfrm>
           <a:prstGeom prst="rect">
             <a:avLst/>
@@ -5020,23 +5020,23 @@
         </p:nvSpPr>
         <p:spPr>
           <a:xfrm>
-            <a:off x="291032" y="765800"/>
-            <a:ext cx="1357320" cy="390000"/>
-          </a:xfrm>
-          <a:prstGeom prst="rect">
-            <a:avLst/>
-          </a:prstGeom>
-          <a:noFill/>
-        </p:spPr>
-        <p:txBody>
-          <a:bodyPr wrap="square">
-            <a:spAutoFit/>
-          </a:bodyPr>
-          <a:lstStyle/>
-          <a:p>
-            <a:pPr algn="ctr"/>
-            <a:r>
-              <a:rPr sz="950" b="1">
+            <a:off x="278032" y="730800"/>
+            <a:ext cx="1059280" cy="330000"/>
+          </a:xfrm>
+          <a:prstGeom prst="rect">
+            <a:avLst/>
+          </a:prstGeom>
+          <a:noFill/>
+        </p:spPr>
+        <p:txBody>
+          <a:bodyPr wrap="square">
+            <a:spAutoFit/>
+          </a:bodyPr>
+          <a:lstStyle/>
+          <a:p>
+            <a:pPr algn="ctr"/>
+            <a:r>
+              <a:rPr sz="1000" b="1">
                 <a:solidFill>
                   <a:srgbClr val="999080"/>
                 </a:solidFill>
@@ -5055,54 +5055,60 @@
         </p:nvSpPr>
         <p:spPr>
           <a:xfrm>
-            <a:off x="281032" y="1205800"/>
-            <a:ext cx="1372320" cy="760000"/>
-          </a:xfrm>
-          <a:prstGeom prst="rect">
-            <a:avLst/>
-          </a:prstGeom>
-          <a:noFill/>
-        </p:spPr>
-        <p:txBody>
-          <a:bodyPr wrap="square">
-            <a:spAutoFit/>
-          </a:bodyPr>
-          <a:lstStyle/>
-          <a:p>
-            <a:pPr algn="ctr"/>
-            <a:r>
-              <a:rPr sz="750" b="0">
+            <a:off x="271032" y="1105800"/>
+            <a:ext cx="1071280" cy="1160000"/>
+          </a:xfrm>
+          <a:prstGeom prst="rect">
+            <a:avLst/>
+          </a:prstGeom>
+          <a:noFill/>
+        </p:spPr>
+        <p:txBody>
+          <a:bodyPr wrap="square">
+            <a:spAutoFit/>
+          </a:bodyPr>
+          <a:lstStyle/>
+          <a:p>
+            <a:pPr algn="ctr"/>
+            <a:r>
+              <a:rPr sz="700" b="0">
                 <a:solidFill>
                   <a:srgbClr val="999080"/>
                 </a:solidFill>
                 <a:latin typeface="メイリオ"/>
               </a:rPr>
-              <a:t>カムラポイント蓄積
+              <a:t>カムラポイント
+蓄積
 ステージ変化
-[大社跡→溶岩洞]</a:t>
-            </a:r>
-          </a:p>
-        </p:txBody>
-      </p:sp>
-      <p:sp>
-        <p:nvSpPr>
-          <p:cNvPr id="11" name="Can 10"/>
+大社跡→溶岩洞
+レア役→
+ライズゾーン
+(PT特化)</a:t>
+            </a:r>
+          </a:p>
+        </p:txBody>
+      </p:sp>
+      <p:sp>
+        <p:nvSpPr>
+          <p:cNvPr id="11" name="Rectangle 10"/>
           <p:cNvSpPr/>
           <p:nvPr/>
         </p:nvSpPr>
         <p:spPr>
           <a:xfrm>
-            <a:off x="1681352" y="1270800"/>
-            <a:ext cx="200000" cy="180000"/>
-          </a:xfrm>
-          <a:prstGeom prst="can">
-            <a:avLst/>
-          </a:prstGeom>
-          <a:solidFill>
-            <a:srgbClr val="22CCDD"/>
-          </a:solidFill>
-          <a:ln>
-            <a:noFill/>
+            <a:off x="1627632" y="685800"/>
+            <a:ext cx="4206240" cy="780000"/>
+          </a:xfrm>
+          <a:prstGeom prst="rect">
+            <a:avLst/>
+          </a:prstGeom>
+          <a:solidFill>
+            <a:srgbClr val="181208"/>
+          </a:solidFill>
+          <a:ln w="19050">
+            <a:solidFill>
+              <a:srgbClr val="22CCDD"/>
+            </a:solidFill>
           </a:ln>
         </p:spPr>
         <p:style>
@@ -5129,25 +5135,93 @@
       </p:sp>
       <p:sp>
         <p:nvSpPr>
-          <p:cNvPr id="12" name="Rectangle 11"/>
+          <p:cNvPr id="12" name="TextBox 11"/>
+          <p:cNvSpPr txBox="1"/>
+          <p:nvPr/>
+        </p:nvSpPr>
+        <p:spPr>
+          <a:xfrm>
+            <a:off x="1655632" y="723800"/>
+            <a:ext cx="4156240" cy="290000"/>
+          </a:xfrm>
+          <a:prstGeom prst="rect">
+            <a:avLst/>
+          </a:prstGeom>
+          <a:noFill/>
+        </p:spPr>
+        <p:txBody>
+          <a:bodyPr wrap="square">
+            <a:spAutoFit/>
+          </a:bodyPr>
+          <a:lstStyle/>
+          <a:p>
+            <a:pPr algn="ctr"/>
+            <a:r>
+              <a:rPr sz="900" b="1">
+                <a:solidFill>
+                  <a:srgbClr val="22CCDD"/>
+                </a:solidFill>
+                <a:latin typeface="游明朝"/>
+              </a:rPr>
+              <a:t>クエスト ／ 百竜夜行（規定カムラポイント到達）</a:t>
+            </a:r>
+          </a:p>
+        </p:txBody>
+      </p:sp>
+      <p:sp>
+        <p:nvSpPr>
+          <p:cNvPr id="13" name="TextBox 12"/>
+          <p:cNvSpPr txBox="1"/>
+          <p:nvPr/>
+        </p:nvSpPr>
+        <p:spPr>
+          <a:xfrm>
+            <a:off x="1647632" y="1045800"/>
+            <a:ext cx="4170240" cy="370000"/>
+          </a:xfrm>
+          <a:prstGeom prst="rect">
+            <a:avLst/>
+          </a:prstGeom>
+          <a:noFill/>
+        </p:spPr>
+        <p:txBody>
+          <a:bodyPr wrap="square">
+            <a:spAutoFit/>
+          </a:bodyPr>
+          <a:lstStyle/>
+          <a:p>
+            <a:pPr algn="ctr"/>
+            <a:r>
+              <a:rPr sz="750" b="0">
+                <a:solidFill>
+                  <a:srgbClr val="999080"/>
+                </a:solidFill>
+                <a:latin typeface="メイリオ"/>
+              </a:rPr>
+              <a:t>規定PT到達でクエスト発展（成功率36%でAT直入り）　一部が百竜夜行（激熱CZ・成功率70%・大連続BONUS）へ昇格</a:t>
+            </a:r>
+          </a:p>
+        </p:txBody>
+      </p:sp>
+      <p:sp>
+        <p:nvSpPr>
+          <p:cNvPr id="14" name="Can 13"/>
           <p:cNvSpPr/>
           <p:nvPr/>
         </p:nvSpPr>
         <p:spPr>
           <a:xfrm>
-            <a:off x="1801368" y="685800"/>
-            <a:ext cx="1417320" cy="1350000"/>
-          </a:xfrm>
-          <a:prstGeom prst="rect">
-            <a:avLst/>
-          </a:prstGeom>
-          <a:solidFill>
-            <a:srgbClr val="181208"/>
-          </a:solidFill>
-          <a:ln w="22860">
-            <a:solidFill>
-              <a:srgbClr val="22CCDD"/>
-            </a:solidFill>
+            <a:off x="1361312" y="985800"/>
+            <a:ext cx="200000" cy="180000"/>
+          </a:xfrm>
+          <a:prstGeom prst="can">
+            <a:avLst/>
+          </a:prstGeom>
+          <a:solidFill>
+            <a:srgbClr val="22CCDD"/>
+          </a:solidFill>
+          <a:ln>
+            <a:noFill/>
           </a:ln>
         </p:spPr>
         <p:style>
@@ -5174,93 +5248,20 @@
       </p:sp>
       <p:sp>
         <p:nvSpPr>
-          <p:cNvPr id="13" name="TextBox 12"/>
-          <p:cNvSpPr txBox="1"/>
-          <p:nvPr/>
-        </p:nvSpPr>
-        <p:spPr>
-          <a:xfrm>
-            <a:off x="1836368" y="765800"/>
-            <a:ext cx="1357320" cy="390000"/>
-          </a:xfrm>
-          <a:prstGeom prst="rect">
-            <a:avLst/>
-          </a:prstGeom>
-          <a:noFill/>
-        </p:spPr>
-        <p:txBody>
-          <a:bodyPr wrap="square">
-            <a:spAutoFit/>
-          </a:bodyPr>
-          <a:lstStyle/>
-          <a:p>
-            <a:pPr algn="ctr"/>
-            <a:r>
-              <a:rPr sz="950" b="1">
-                <a:solidFill>
-                  <a:srgbClr val="22CCDD"/>
-                </a:solidFill>
-                <a:latin typeface="游明朝"/>
-              </a:rPr>
-              <a:t>クエスト
-(規定PT到達)</a:t>
-            </a:r>
-          </a:p>
-        </p:txBody>
-      </p:sp>
-      <p:sp>
-        <p:nvSpPr>
-          <p:cNvPr id="14" name="TextBox 13"/>
-          <p:cNvSpPr txBox="1"/>
-          <p:nvPr/>
-        </p:nvSpPr>
-        <p:spPr>
-          <a:xfrm>
-            <a:off x="1826368" y="1205800"/>
-            <a:ext cx="1372320" cy="760000"/>
-          </a:xfrm>
-          <a:prstGeom prst="rect">
-            <a:avLst/>
-          </a:prstGeom>
-          <a:noFill/>
-        </p:spPr>
-        <p:txBody>
-          <a:bodyPr wrap="square">
-            <a:spAutoFit/>
-          </a:bodyPr>
-          <a:lstStyle/>
-          <a:p>
-            <a:pPr algn="ctr"/>
-            <a:r>
-              <a:rPr sz="750" b="0">
-                <a:solidFill>
-                  <a:srgbClr val="999080"/>
-                </a:solidFill>
-                <a:latin typeface="メイリオ"/>
-              </a:rPr>
-              <a:t>カムラPT到達で
-クエスト発展
-成功でAT直入り</a:t>
-            </a:r>
-          </a:p>
-        </p:txBody>
-      </p:sp>
-      <p:sp>
-        <p:nvSpPr>
           <p:cNvPr id="15" name="Can 14"/>
           <p:cNvSpPr/>
           <p:nvPr/>
         </p:nvSpPr>
         <p:spPr>
           <a:xfrm>
-            <a:off x="3226688" y="1270800"/>
+            <a:off x="5843872" y="985800"/>
             <a:ext cx="200000" cy="180000"/>
           </a:xfrm>
           <a:prstGeom prst="can">
             <a:avLst/>
           </a:prstGeom>
           <a:solidFill>
-            <a:srgbClr val="22AA44"/>
+            <a:srgbClr val="FF8800"/>
           </a:solidFill>
           <a:ln>
             <a:noFill/>
@@ -5296,8 +5297,8 @@
         </p:nvSpPr>
         <p:spPr>
           <a:xfrm>
-            <a:off x="3346704" y="685800"/>
-            <a:ext cx="1417320" cy="1350000"/>
+            <a:off x="1627632" y="1565800"/>
+            <a:ext cx="4206240" cy="780000"/>
           </a:xfrm>
           <a:prstGeom prst="rect">
             <a:avLst/>
@@ -5305,7 +5306,7 @@
           <a:solidFill>
             <a:srgbClr val="181208"/>
           </a:solidFill>
-          <a:ln w="22860">
+          <a:ln w="19050">
             <a:solidFill>
               <a:srgbClr val="188030"/>
             </a:solidFill>
@@ -5341,30 +5342,29 @@
         </p:nvSpPr>
         <p:spPr>
           <a:xfrm>
-            <a:off x="3381704" y="765800"/>
-            <a:ext cx="1357320" cy="390000"/>
-          </a:xfrm>
-          <a:prstGeom prst="rect">
-            <a:avLst/>
-          </a:prstGeom>
-          <a:noFill/>
-        </p:spPr>
-        <p:txBody>
-          <a:bodyPr wrap="square">
-            <a:spAutoFit/>
-          </a:bodyPr>
-          <a:lstStyle/>
-          <a:p>
-            <a:pPr algn="ctr"/>
-            <a:r>
-              <a:rPr sz="950" b="1">
+            <a:off x="1655632" y="1603800"/>
+            <a:ext cx="4156240" cy="290000"/>
+          </a:xfrm>
+          <a:prstGeom prst="rect">
+            <a:avLst/>
+          </a:prstGeom>
+          <a:noFill/>
+        </p:spPr>
+        <p:txBody>
+          <a:bodyPr wrap="square">
+            <a:spAutoFit/>
+          </a:bodyPr>
+          <a:lstStyle/>
+          <a:p>
+            <a:pPr algn="ctr"/>
+            <a:r>
+              <a:rPr sz="900" b="1">
                 <a:solidFill>
                   <a:srgbClr val="188030"/>
                 </a:solidFill>
                 <a:latin typeface="游明朝"/>
               </a:rPr>
-              <a:t>だるま落とし
-(CZ)</a:t>
+              <a:t>アイルーだるま落とし（リプレイ規定回数到達）</a:t>
             </a:r>
           </a:p>
         </p:txBody>
@@ -5377,8 +5377,8 @@
         </p:nvSpPr>
         <p:spPr>
           <a:xfrm>
-            <a:off x="3371704" y="1205800"/>
-            <a:ext cx="1372320" cy="760000"/>
+            <a:off x="1647632" y="1925800"/>
+            <a:ext cx="4170240" cy="370000"/>
           </a:xfrm>
           <a:prstGeom prst="rect">
             <a:avLst/>
@@ -5399,9 +5399,7 @@
                 </a:solidFill>
                 <a:latin typeface="メイリオ"/>
               </a:rPr>
-              <a:t>リプレイ規定回数
-到達で突入
-自力突破タイプ</a:t>
+              <a:t>40/80/120/160/200回リプレイで突入　5G継続STタイプ　成功率約48%でAT当選</a:t>
             </a:r>
           </a:p>
         </p:txBody>
@@ -5414,14 +5412,14 @@
         </p:nvSpPr>
         <p:spPr>
           <a:xfrm>
-            <a:off x="4772024" y="1270800"/>
+            <a:off x="1361312" y="1865800"/>
             <a:ext cx="200000" cy="180000"/>
           </a:xfrm>
           <a:prstGeom prst="can">
             <a:avLst/>
           </a:prstGeom>
           <a:solidFill>
-            <a:srgbClr val="22AA44"/>
+            <a:srgbClr val="188030"/>
           </a:solidFill>
           <a:ln>
             <a:noFill/>
@@ -5451,14 +5449,541 @@
       </p:sp>
       <p:sp>
         <p:nvSpPr>
-          <p:cNvPr id="20" name="Rectangle 19"/>
+          <p:cNvPr id="20" name="Can 19"/>
           <p:cNvSpPr/>
           <p:nvPr/>
         </p:nvSpPr>
         <p:spPr>
           <a:xfrm>
-            <a:off x="4892040" y="685800"/>
-            <a:ext cx="1417320" cy="1350000"/>
+            <a:off x="5843872" y="1865800"/>
+            <a:ext cx="200000" cy="180000"/>
+          </a:xfrm>
+          <a:prstGeom prst="can">
+            <a:avLst/>
+          </a:prstGeom>
+          <a:solidFill>
+            <a:srgbClr val="FF8800"/>
+          </a:solidFill>
+          <a:ln>
+            <a:noFill/>
+          </a:ln>
+        </p:spPr>
+        <p:style>
+          <a:lnRef idx="1">
+            <a:schemeClr val="accent1"/>
+          </a:lnRef>
+          <a:fillRef idx="3">
+            <a:schemeClr val="accent1"/>
+          </a:fillRef>
+          <a:effectRef idx="2">
+            <a:schemeClr val="accent1"/>
+          </a:effectRef>
+          <a:fontRef idx="minor">
+            <a:schemeClr val="lt1"/>
+          </a:fontRef>
+        </p:style>
+        <p:txBody>
+          <a:bodyPr rtlCol="0" anchor="ctr"/>
+          <a:lstStyle/>
+          <a:p>
+            <a:pPr algn="ctr"/>
+          </a:p>
+        </p:txBody>
+      </p:sp>
+      <p:sp>
+        <p:nvSpPr>
+          <p:cNvPr id="21" name="Rectangle 20"/>
+          <p:cNvSpPr/>
+          <p:nvPr/>
+        </p:nvSpPr>
+        <p:spPr>
+          <a:xfrm>
+            <a:off x="6089904" y="685800"/>
+            <a:ext cx="2980944" cy="1680000"/>
+          </a:xfrm>
+          <a:prstGeom prst="rect">
+            <a:avLst/>
+          </a:prstGeom>
+          <a:solidFill>
+            <a:srgbClr val="181208"/>
+          </a:solidFill>
+          <a:ln w="22860">
+            <a:solidFill>
+              <a:srgbClr val="FF8800"/>
+            </a:solidFill>
+          </a:ln>
+        </p:spPr>
+        <p:style>
+          <a:lnRef idx="1">
+            <a:schemeClr val="accent1"/>
+          </a:lnRef>
+          <a:fillRef idx="3">
+            <a:schemeClr val="accent1"/>
+          </a:fillRef>
+          <a:effectRef idx="2">
+            <a:schemeClr val="accent1"/>
+          </a:effectRef>
+          <a:fontRef idx="minor">
+            <a:schemeClr val="lt1"/>
+          </a:fontRef>
+        </p:style>
+        <p:txBody>
+          <a:bodyPr rtlCol="0" anchor="ctr"/>
+          <a:lstStyle/>
+          <a:p>
+            <a:pPr algn="ctr"/>
+          </a:p>
+        </p:txBody>
+      </p:sp>
+      <p:sp>
+        <p:nvSpPr>
+          <p:cNvPr id="22" name="TextBox 21"/>
+          <p:cNvSpPr txBox="1"/>
+          <p:nvPr/>
+        </p:nvSpPr>
+        <p:spPr>
+          <a:xfrm>
+            <a:off x="6109904" y="730800"/>
+            <a:ext cx="2946944" cy="350000"/>
+          </a:xfrm>
+          <a:prstGeom prst="rect">
+            <a:avLst/>
+          </a:prstGeom>
+          <a:noFill/>
+        </p:spPr>
+        <p:txBody>
+          <a:bodyPr wrap="square">
+            <a:spAutoFit/>
+          </a:bodyPr>
+          <a:lstStyle/>
+          <a:p>
+            <a:pPr algn="ctr"/>
+            <a:r>
+              <a:rPr sz="1000" b="1">
+                <a:solidFill>
+                  <a:srgbClr val="FF8800"/>
+                </a:solidFill>
+                <a:latin typeface="游明朝"/>
+              </a:rPr>
+              <a:t>狩猟ボーナス
+(AT入口)</a:t>
+            </a:r>
+          </a:p>
+        </p:txBody>
+      </p:sp>
+      <p:sp>
+        <p:nvSpPr>
+          <p:cNvPr id="23" name="TextBox 22"/>
+          <p:cNvSpPr txBox="1"/>
+          <p:nvPr/>
+        </p:nvSpPr>
+        <p:spPr>
+          <a:xfrm>
+            <a:off x="6105904" y="1145800"/>
+            <a:ext cx="2952944" cy="1100000"/>
+          </a:xfrm>
+          <a:prstGeom prst="rect">
+            <a:avLst/>
+          </a:prstGeom>
+          <a:noFill/>
+        </p:spPr>
+        <p:txBody>
+          <a:bodyPr wrap="square">
+            <a:spAutoFit/>
+          </a:bodyPr>
+          <a:lstStyle/>
+          <a:p>
+            <a:pPr algn="ctr"/>
+            <a:r>
+              <a:rPr sz="750" b="0">
+                <a:solidFill>
+                  <a:srgbClr val="999080"/>
+                </a:solidFill>
+                <a:latin typeface="メイリオ"/>
+              </a:rPr>
+              <a:t>BAR/赤7/紫7の3種
+保障G数が異なる
+集会所スタートの
+超抽選バトル</a:t>
+            </a:r>
+          </a:p>
+        </p:txBody>
+      </p:sp>
+      <p:sp>
+        <p:nvSpPr>
+          <p:cNvPr id="24" name="Rectangle 23"/>
+          <p:cNvSpPr/>
+          <p:nvPr/>
+        </p:nvSpPr>
+        <p:spPr>
+          <a:xfrm>
+            <a:off x="0" y="2505800"/>
+            <a:ext cx="9144000" cy="5000"/>
+          </a:xfrm>
+          <a:prstGeom prst="rect">
+            <a:avLst/>
+          </a:prstGeom>
+          <a:solidFill>
+            <a:srgbClr val="305018"/>
+          </a:solidFill>
+          <a:ln>
+            <a:noFill/>
+          </a:ln>
+        </p:spPr>
+        <p:style>
+          <a:lnRef idx="1">
+            <a:schemeClr val="accent1"/>
+          </a:lnRef>
+          <a:fillRef idx="3">
+            <a:schemeClr val="accent1"/>
+          </a:fillRef>
+          <a:effectRef idx="2">
+            <a:schemeClr val="accent1"/>
+          </a:effectRef>
+          <a:fontRef idx="minor">
+            <a:schemeClr val="lt1"/>
+          </a:fontRef>
+        </p:style>
+        <p:txBody>
+          <a:bodyPr rtlCol="0" anchor="ctr"/>
+          <a:lstStyle/>
+          <a:p>
+            <a:pPr algn="ctr"/>
+          </a:p>
+        </p:txBody>
+      </p:sp>
+      <p:sp>
+        <p:nvSpPr>
+          <p:cNvPr id="25" name="Rectangle 24"/>
+          <p:cNvSpPr/>
+          <p:nvPr/>
+        </p:nvSpPr>
+        <p:spPr>
+          <a:xfrm>
+            <a:off x="256032" y="2665800"/>
+            <a:ext cx="1508760" cy="1600000"/>
+          </a:xfrm>
+          <a:prstGeom prst="rect">
+            <a:avLst/>
+          </a:prstGeom>
+          <a:solidFill>
+            <a:srgbClr val="20180A"/>
+          </a:solidFill>
+          <a:ln w="22860">
+            <a:solidFill>
+              <a:srgbClr val="999080"/>
+            </a:solidFill>
+          </a:ln>
+        </p:spPr>
+        <p:style>
+          <a:lnRef idx="1">
+            <a:schemeClr val="accent1"/>
+          </a:lnRef>
+          <a:fillRef idx="3">
+            <a:schemeClr val="accent1"/>
+          </a:fillRef>
+          <a:effectRef idx="2">
+            <a:schemeClr val="accent1"/>
+          </a:effectRef>
+          <a:fontRef idx="minor">
+            <a:schemeClr val="lt1"/>
+          </a:fontRef>
+        </p:style>
+        <p:txBody>
+          <a:bodyPr rtlCol="0" anchor="ctr"/>
+          <a:lstStyle/>
+          <a:p>
+            <a:pPr algn="ctr"/>
+          </a:p>
+        </p:txBody>
+      </p:sp>
+      <p:sp>
+        <p:nvSpPr>
+          <p:cNvPr id="26" name="TextBox 25"/>
+          <p:cNvSpPr txBox="1"/>
+          <p:nvPr/>
+        </p:nvSpPr>
+        <p:spPr>
+          <a:xfrm>
+            <a:off x="288032" y="2735800"/>
+            <a:ext cx="1453760" cy="380000"/>
+          </a:xfrm>
+          <a:prstGeom prst="rect">
+            <a:avLst/>
+          </a:prstGeom>
+          <a:noFill/>
+        </p:spPr>
+        <p:txBody>
+          <a:bodyPr wrap="square">
+            <a:spAutoFit/>
+          </a:bodyPr>
+          <a:lstStyle/>
+          <a:p>
+            <a:pPr algn="ctr"/>
+            <a:r>
+              <a:rPr sz="950" b="1">
+                <a:solidFill>
+                  <a:srgbClr val="999080"/>
+                </a:solidFill>
+                <a:latin typeface="游明朝"/>
+              </a:rPr>
+              <a:t>集会所
+(ループ起点)</a:t>
+            </a:r>
+          </a:p>
+        </p:txBody>
+      </p:sp>
+      <p:sp>
+        <p:nvSpPr>
+          <p:cNvPr id="27" name="TextBox 26"/>
+          <p:cNvSpPr txBox="1"/>
+          <p:nvPr/>
+        </p:nvSpPr>
+        <p:spPr>
+          <a:xfrm>
+            <a:off x="278032" y="3155800"/>
+            <a:ext cx="1468760" cy="1010000"/>
+          </a:xfrm>
+          <a:prstGeom prst="rect">
+            <a:avLst/>
+          </a:prstGeom>
+          <a:noFill/>
+        </p:spPr>
+        <p:txBody>
+          <a:bodyPr wrap="square">
+            <a:spAutoFit/>
+          </a:bodyPr>
+          <a:lstStyle/>
+          <a:p>
+            <a:pPr algn="ctr"/>
+            <a:r>
+              <a:rPr sz="750" b="0">
+                <a:solidFill>
+                  <a:srgbClr val="999080"/>
+                </a:solidFill>
+                <a:latin typeface="メイリオ"/>
+              </a:rPr>
+              <a:t>AT継続の起点
+討伐失敗でも
+ストックで復帰</a:t>
+            </a:r>
+          </a:p>
+        </p:txBody>
+      </p:sp>
+      <p:sp>
+        <p:nvSpPr>
+          <p:cNvPr id="28" name="Can 27"/>
+          <p:cNvSpPr/>
+          <p:nvPr/>
+        </p:nvSpPr>
+        <p:spPr>
+          <a:xfrm>
+            <a:off x="1774792" y="3375800"/>
+            <a:ext cx="200000" cy="180000"/>
+          </a:xfrm>
+          <a:prstGeom prst="can">
+            <a:avLst/>
+          </a:prstGeom>
+          <a:solidFill>
+            <a:srgbClr val="FF8800"/>
+          </a:solidFill>
+          <a:ln>
+            <a:noFill/>
+          </a:ln>
+        </p:spPr>
+        <p:style>
+          <a:lnRef idx="1">
+            <a:schemeClr val="accent1"/>
+          </a:lnRef>
+          <a:fillRef idx="3">
+            <a:schemeClr val="accent1"/>
+          </a:fillRef>
+          <a:effectRef idx="2">
+            <a:schemeClr val="accent1"/>
+          </a:effectRef>
+          <a:fontRef idx="minor">
+            <a:schemeClr val="lt1"/>
+          </a:fontRef>
+        </p:style>
+        <p:txBody>
+          <a:bodyPr rtlCol="0" anchor="ctr"/>
+          <a:lstStyle/>
+          <a:p>
+            <a:pPr algn="ctr"/>
+          </a:p>
+        </p:txBody>
+      </p:sp>
+      <p:sp>
+        <p:nvSpPr>
+          <p:cNvPr id="29" name="Rectangle 28"/>
+          <p:cNvSpPr/>
+          <p:nvPr/>
+        </p:nvSpPr>
+        <p:spPr>
+          <a:xfrm>
+            <a:off x="1920240" y="2665800"/>
+            <a:ext cx="1508760" cy="1600000"/>
+          </a:xfrm>
+          <a:prstGeom prst="rect">
+            <a:avLst/>
+          </a:prstGeom>
+          <a:solidFill>
+            <a:srgbClr val="181208"/>
+          </a:solidFill>
+          <a:ln w="22860">
+            <a:solidFill>
+              <a:srgbClr val="FF8800"/>
+            </a:solidFill>
+          </a:ln>
+        </p:spPr>
+        <p:style>
+          <a:lnRef idx="1">
+            <a:schemeClr val="accent1"/>
+          </a:lnRef>
+          <a:fillRef idx="3">
+            <a:schemeClr val="accent1"/>
+          </a:fillRef>
+          <a:effectRef idx="2">
+            <a:schemeClr val="accent1"/>
+          </a:effectRef>
+          <a:fontRef idx="minor">
+            <a:schemeClr val="lt1"/>
+          </a:fontRef>
+        </p:style>
+        <p:txBody>
+          <a:bodyPr rtlCol="0" anchor="ctr"/>
+          <a:lstStyle/>
+          <a:p>
+            <a:pPr algn="ctr"/>
+          </a:p>
+        </p:txBody>
+      </p:sp>
+      <p:sp>
+        <p:nvSpPr>
+          <p:cNvPr id="30" name="TextBox 29"/>
+          <p:cNvSpPr txBox="1"/>
+          <p:nvPr/>
+        </p:nvSpPr>
+        <p:spPr>
+          <a:xfrm>
+            <a:off x="1952240" y="2735800"/>
+            <a:ext cx="1453760" cy="380000"/>
+          </a:xfrm>
+          <a:prstGeom prst="rect">
+            <a:avLst/>
+          </a:prstGeom>
+          <a:noFill/>
+        </p:spPr>
+        <p:txBody>
+          <a:bodyPr wrap="square">
+            <a:spAutoFit/>
+          </a:bodyPr>
+          <a:lstStyle/>
+          <a:p>
+            <a:pPr algn="ctr"/>
+            <a:r>
+              <a:rPr sz="950" b="1">
+                <a:solidFill>
+                  <a:srgbClr val="FF8800"/>
+                </a:solidFill>
+                <a:latin typeface="游明朝"/>
+              </a:rPr>
+              <a:t>狩猟ボーナス
+(超抽選バトル)</a:t>
+            </a:r>
+          </a:p>
+        </p:txBody>
+      </p:sp>
+      <p:sp>
+        <p:nvSpPr>
+          <p:cNvPr id="31" name="TextBox 30"/>
+          <p:cNvSpPr txBox="1"/>
+          <p:nvPr/>
+        </p:nvSpPr>
+        <p:spPr>
+          <a:xfrm>
+            <a:off x="1942240" y="3155800"/>
+            <a:ext cx="1468760" cy="1010000"/>
+          </a:xfrm>
+          <a:prstGeom prst="rect">
+            <a:avLst/>
+          </a:prstGeom>
+          <a:noFill/>
+        </p:spPr>
+        <p:txBody>
+          <a:bodyPr wrap="square">
+            <a:spAutoFit/>
+          </a:bodyPr>
+          <a:lstStyle/>
+          <a:p>
+            <a:pPr algn="ctr"/>
+            <a:r>
+              <a:rPr sz="750" b="0">
+                <a:solidFill>
+                  <a:srgbClr val="999080"/>
+                </a:solidFill>
+                <a:latin typeface="メイリオ"/>
+              </a:rPr>
+              <a:t>BAR/赤7/紫7の3種
+討伐成功→剥ぎ取り
+討伐失敗→集会所</a:t>
+            </a:r>
+          </a:p>
+        </p:txBody>
+      </p:sp>
+      <p:sp>
+        <p:nvSpPr>
+          <p:cNvPr id="32" name="Can 31"/>
+          <p:cNvSpPr/>
+          <p:nvPr/>
+        </p:nvSpPr>
+        <p:spPr>
+          <a:xfrm>
+            <a:off x="3439000" y="3375800"/>
+            <a:ext cx="200000" cy="180000"/>
+          </a:xfrm>
+          <a:prstGeom prst="can">
+            <a:avLst/>
+          </a:prstGeom>
+          <a:solidFill>
+            <a:srgbClr val="CCAA22"/>
+          </a:solidFill>
+          <a:ln>
+            <a:noFill/>
+          </a:ln>
+        </p:spPr>
+        <p:style>
+          <a:lnRef idx="1">
+            <a:schemeClr val="accent1"/>
+          </a:lnRef>
+          <a:fillRef idx="3">
+            <a:schemeClr val="accent1"/>
+          </a:fillRef>
+          <a:effectRef idx="2">
+            <a:schemeClr val="accent1"/>
+          </a:effectRef>
+          <a:fontRef idx="minor">
+            <a:schemeClr val="lt1"/>
+          </a:fontRef>
+        </p:style>
+        <p:txBody>
+          <a:bodyPr rtlCol="0" anchor="ctr"/>
+          <a:lstStyle/>
+          <a:p>
+            <a:pPr algn="ctr"/>
+          </a:p>
+        </p:txBody>
+      </p:sp>
+      <p:sp>
+        <p:nvSpPr>
+          <p:cNvPr id="33" name="Rectangle 32"/>
+          <p:cNvSpPr/>
+          <p:nvPr/>
+        </p:nvSpPr>
+        <p:spPr>
+          <a:xfrm>
+            <a:off x="3584448" y="2665800"/>
+            <a:ext cx="1508760" cy="1600000"/>
           </a:xfrm>
           <a:prstGeom prst="rect">
             <a:avLst/>
@@ -5496,14 +6021,14 @@
       </p:sp>
       <p:sp>
         <p:nvSpPr>
-          <p:cNvPr id="21" name="TextBox 20"/>
-          <p:cNvSpPr txBox="1"/>
-          <p:nvPr/>
-        </p:nvSpPr>
-        <p:spPr>
-          <a:xfrm>
-            <a:off x="4927040" y="765800"/>
-            <a:ext cx="1357320" cy="390000"/>
+          <p:cNvPr id="34" name="TextBox 33"/>
+          <p:cNvSpPr txBox="1"/>
+          <p:nvPr/>
+        </p:nvSpPr>
+        <p:spPr>
+          <a:xfrm>
+            <a:off x="3616448" y="2735800"/>
+            <a:ext cx="1453760" cy="380000"/>
           </a:xfrm>
           <a:prstGeom prst="rect">
             <a:avLst/>
@@ -5524,22 +6049,22 @@
                 </a:solidFill>
                 <a:latin typeface="游明朝"/>
               </a:rPr>
-              <a:t>百竜夜行
-(上位CZ)</a:t>
-            </a:r>
-          </a:p>
-        </p:txBody>
-      </p:sp>
-      <p:sp>
-        <p:nvSpPr>
-          <p:cNvPr id="22" name="TextBox 21"/>
-          <p:cNvSpPr txBox="1"/>
-          <p:nvPr/>
-        </p:nvSpPr>
-        <p:spPr>
-          <a:xfrm>
-            <a:off x="4917040" y="1205800"/>
-            <a:ext cx="1372320" cy="760000"/>
+              <a:t>剥ぎ取りチャンス
+/百竜刀</a:t>
+            </a:r>
+          </a:p>
+        </p:txBody>
+      </p:sp>
+      <p:sp>
+        <p:nvSpPr>
+          <p:cNvPr id="35" name="TextBox 34"/>
+          <p:cNvSpPr txBox="1"/>
+          <p:nvPr/>
+        </p:nvSpPr>
+        <p:spPr>
+          <a:xfrm>
+            <a:off x="3606448" y="3155800"/>
+            <a:ext cx="1468760" cy="1010000"/>
           </a:xfrm>
           <a:prstGeom prst="rect">
             <a:avLst/>
@@ -5560,29 +6085,29 @@
                 </a:solidFill>
                 <a:latin typeface="メイリオ"/>
               </a:rPr>
-              <a:t>規定PT到達の一部
-成功率約70%
-大連続BONUS確定</a:t>
-            </a:r>
-          </a:p>
-        </p:txBody>
-      </p:sp>
-      <p:sp>
-        <p:nvSpPr>
-          <p:cNvPr id="23" name="Can 22"/>
+              <a:t>討伐後の報酬タイム
+早期討伐で百竜刀
+(ストック特化)へ</a:t>
+            </a:r>
+          </a:p>
+        </p:txBody>
+      </p:sp>
+      <p:sp>
+        <p:nvSpPr>
+          <p:cNvPr id="36" name="Can 35"/>
           <p:cNvSpPr/>
           <p:nvPr/>
         </p:nvSpPr>
         <p:spPr>
           <a:xfrm>
-            <a:off x="6317360" y="1270800"/>
+            <a:off x="5103208" y="3375800"/>
             <a:ext cx="200000" cy="180000"/>
           </a:xfrm>
           <a:prstGeom prst="can">
             <a:avLst/>
           </a:prstGeom>
           <a:solidFill>
-            <a:srgbClr val="22AA44"/>
+            <a:srgbClr val="CCAA22"/>
           </a:solidFill>
           <a:ln>
             <a:noFill/>
@@ -5612,14 +6137,14 @@
       </p:sp>
       <p:sp>
         <p:nvSpPr>
-          <p:cNvPr id="24" name="Rectangle 23"/>
+          <p:cNvPr id="37" name="Rectangle 36"/>
           <p:cNvSpPr/>
           <p:nvPr/>
         </p:nvSpPr>
         <p:spPr>
           <a:xfrm>
-            <a:off x="6437376" y="685800"/>
-            <a:ext cx="1417320" cy="1350000"/>
+            <a:off x="5248656" y="2665800"/>
+            <a:ext cx="1508760" cy="1600000"/>
           </a:xfrm>
           <a:prstGeom prst="rect">
             <a:avLst/>
@@ -5629,7 +6154,7 @@
           </a:solidFill>
           <a:ln w="22860">
             <a:solidFill>
-              <a:srgbClr val="FF8800"/>
+              <a:srgbClr val="FFDD44"/>
             </a:solidFill>
           </a:ln>
         </p:spPr>
@@ -5657,14 +6182,14 @@
       </p:sp>
       <p:sp>
         <p:nvSpPr>
-          <p:cNvPr id="25" name="TextBox 24"/>
-          <p:cNvSpPr txBox="1"/>
-          <p:nvPr/>
-        </p:nvSpPr>
-        <p:spPr>
-          <a:xfrm>
-            <a:off x="6472376" y="765800"/>
-            <a:ext cx="1357320" cy="390000"/>
+          <p:cNvPr id="38" name="TextBox 37"/>
+          <p:cNvSpPr txBox="1"/>
+          <p:nvPr/>
+        </p:nvSpPr>
+        <p:spPr>
+          <a:xfrm>
+            <a:off x="5280656" y="2735800"/>
+            <a:ext cx="1453760" cy="380000"/>
           </a:xfrm>
           <a:prstGeom prst="rect">
             <a:avLst/>
@@ -5681,26 +6206,26 @@
             <a:r>
               <a:rPr sz="950" b="1">
                 <a:solidFill>
-                  <a:srgbClr val="FF8800"/>
+                  <a:srgbClr val="FFDD44"/>
                 </a:solidFill>
                 <a:latin typeface="游明朝"/>
               </a:rPr>
-              <a:t>狩猟ボーナス
-(AT入口)</a:t>
-            </a:r>
-          </a:p>
-        </p:txBody>
-      </p:sp>
-      <p:sp>
-        <p:nvSpPr>
-          <p:cNvPr id="26" name="TextBox 25"/>
-          <p:cNvSpPr txBox="1"/>
-          <p:nvPr/>
-        </p:nvSpPr>
-        <p:spPr>
-          <a:xfrm>
-            <a:off x="6462376" y="1205800"/>
-            <a:ext cx="1372320" cy="760000"/>
+              <a:t>エンディング
+(10頭討伐)</a:t>
+            </a:r>
+          </a:p>
+        </p:txBody>
+      </p:sp>
+      <p:sp>
+        <p:nvSpPr>
+          <p:cNvPr id="39" name="TextBox 38"/>
+          <p:cNvSpPr txBox="1"/>
+          <p:nvPr/>
+        </p:nvSpPr>
+        <p:spPr>
+          <a:xfrm>
+            <a:off x="5270656" y="3155800"/>
+            <a:ext cx="1468760" cy="1010000"/>
           </a:xfrm>
           <a:prstGeom prst="rect">
             <a:avLst/>
@@ -5721,64 +6246,29 @@
                 </a:solidFill>
                 <a:latin typeface="メイリオ"/>
               </a:rPr>
-              <a:t>BAR/赤7/紫7の3種
-純増2.7or4.0枚/G
-超抽選バトル</a:t>
-            </a:r>
-          </a:p>
-        </p:txBody>
-      </p:sp>
-      <p:sp>
-        <p:nvSpPr>
-          <p:cNvPr id="27" name="TextBox 26"/>
-          <p:cNvSpPr txBox="1"/>
-          <p:nvPr/>
-        </p:nvSpPr>
-        <p:spPr>
-          <a:xfrm>
-            <a:off x="256032" y="2055800"/>
-            <a:ext cx="3840480" cy="250000"/>
-          </a:xfrm>
-          <a:prstGeom prst="rect">
-            <a:avLst/>
-          </a:prstGeom>
-          <a:noFill/>
-        </p:spPr>
-        <p:txBody>
-          <a:bodyPr wrap="square">
-            <a:spAutoFit/>
-          </a:bodyPr>
-          <a:lstStyle/>
-          <a:p>
-            <a:pPr algn="l"/>
-            <a:r>
-              <a:rPr sz="750" b="0">
-                <a:solidFill>
-                  <a:srgbClr val="22CCDD"/>
-                </a:solidFill>
-                <a:latin typeface="メイリオ"/>
-              </a:rPr>
-              <a:t>レア役→ライズゾーン(PT特化・20セット完走でAT濃厚)→クエストへ合流</a:t>
-            </a:r>
-          </a:p>
-        </p:txBody>
-      </p:sp>
-      <p:sp>
-        <p:nvSpPr>
-          <p:cNvPr id="28" name="Rectangle 27"/>
+              <a:t>10頭討伐で権利
+百竜ノ淵源
+チャレンジ(67%)</a:t>
+            </a:r>
+          </a:p>
+        </p:txBody>
+      </p:sp>
+      <p:sp>
+        <p:nvSpPr>
+          <p:cNvPr id="40" name="Can 39"/>
           <p:cNvSpPr/>
           <p:nvPr/>
         </p:nvSpPr>
         <p:spPr>
           <a:xfrm>
-            <a:off x="256032" y="2285800"/>
-            <a:ext cx="3840480" cy="5000"/>
-          </a:xfrm>
-          <a:prstGeom prst="rect">
-            <a:avLst/>
-          </a:prstGeom>
-          <a:solidFill>
-            <a:srgbClr val="22CCDD"/>
+            <a:off x="6767416" y="3375800"/>
+            <a:ext cx="200000" cy="180000"/>
+          </a:xfrm>
+          <a:prstGeom prst="can">
+            <a:avLst/>
+          </a:prstGeom>
+          <a:solidFill>
+            <a:srgbClr val="CCAA22"/>
           </a:solidFill>
           <a:ln>
             <a:noFill/>
@@ -5808,58 +6298,25 @@
       </p:sp>
       <p:sp>
         <p:nvSpPr>
-          <p:cNvPr id="29" name="TextBox 28"/>
-          <p:cNvSpPr txBox="1"/>
-          <p:nvPr/>
-        </p:nvSpPr>
-        <p:spPr>
-          <a:xfrm>
-            <a:off x="4370832" y="2055800"/>
-            <a:ext cx="2926080" cy="250000"/>
-          </a:xfrm>
-          <a:prstGeom prst="rect">
-            <a:avLst/>
-          </a:prstGeom>
-          <a:noFill/>
-        </p:spPr>
-        <p:txBody>
-          <a:bodyPr wrap="square">
-            <a:spAutoFit/>
-          </a:bodyPr>
-          <a:lstStyle/>
-          <a:p>
-            <a:pPr algn="l"/>
-            <a:r>
-              <a:rPr sz="750" b="0">
-                <a:solidFill>
-                  <a:srgbClr val="999080"/>
-                </a:solidFill>
-                <a:latin typeface="メイリオ"/>
-              </a:rPr>
-              <a:t>天井：リプレイ規定5セット目（累計200回）でCZ確定突入</a:t>
-            </a:r>
-          </a:p>
-        </p:txBody>
-      </p:sp>
-      <p:sp>
-        <p:nvSpPr>
-          <p:cNvPr id="30" name="Rectangle 29"/>
+          <p:cNvPr id="41" name="Rectangle 40"/>
           <p:cNvSpPr/>
           <p:nvPr/>
         </p:nvSpPr>
         <p:spPr>
           <a:xfrm>
-            <a:off x="0" y="2450592"/>
-            <a:ext cx="9144000" cy="5000"/>
-          </a:xfrm>
-          <a:prstGeom prst="rect">
-            <a:avLst/>
-          </a:prstGeom>
-          <a:solidFill>
-            <a:srgbClr val="305018"/>
-          </a:solidFill>
-          <a:ln>
-            <a:noFill/>
+            <a:off x="6912864" y="2665800"/>
+            <a:ext cx="1508760" cy="1600000"/>
+          </a:xfrm>
+          <a:prstGeom prst="rect">
+            <a:avLst/>
+          </a:prstGeom>
+          <a:solidFill>
+            <a:srgbClr val="141002"/>
+          </a:solidFill>
+          <a:ln w="22860">
+            <a:solidFill>
+              <a:srgbClr val="CCAA22"/>
+            </a:solidFill>
           </a:ln>
         </p:spPr>
         <p:style>
@@ -5886,25 +6343,131 @@
       </p:sp>
       <p:sp>
         <p:nvSpPr>
-          <p:cNvPr id="31" name="Rectangle 30"/>
+          <p:cNvPr id="42" name="TextBox 41"/>
+          <p:cNvSpPr txBox="1"/>
+          <p:nvPr/>
+        </p:nvSpPr>
+        <p:spPr>
+          <a:xfrm>
+            <a:off x="6944864" y="2735800"/>
+            <a:ext cx="1453760" cy="380000"/>
+          </a:xfrm>
+          <a:prstGeom prst="rect">
+            <a:avLst/>
+          </a:prstGeom>
+          <a:noFill/>
+        </p:spPr>
+        <p:txBody>
+          <a:bodyPr wrap="square">
+            <a:spAutoFit/>
+          </a:bodyPr>
+          <a:lstStyle/>
+          <a:p>
+            <a:pPr algn="ctr"/>
+            <a:r>
+              <a:rPr sz="950" b="1">
+                <a:solidFill>
+                  <a:srgbClr val="CCAA22"/>
+                </a:solidFill>
+                <a:latin typeface="游明朝"/>
+              </a:rPr>
+              <a:t>気焔万丈
+(上位AT)</a:t>
+            </a:r>
+          </a:p>
+        </p:txBody>
+      </p:sp>
+      <p:sp>
+        <p:nvSpPr>
+          <p:cNvPr id="43" name="TextBox 42"/>
+          <p:cNvSpPr txBox="1"/>
+          <p:nvPr/>
+        </p:nvSpPr>
+        <p:spPr>
+          <a:xfrm>
+            <a:off x="6934864" y="3155800"/>
+            <a:ext cx="1468760" cy="1010000"/>
+          </a:xfrm>
+          <a:prstGeom prst="rect">
+            <a:avLst/>
+          </a:prstGeom>
+          <a:noFill/>
+        </p:spPr>
+        <p:txBody>
+          <a:bodyPr wrap="square">
+            <a:spAutoFit/>
+          </a:bodyPr>
+          <a:lstStyle/>
+          <a:p>
+            <a:pPr algn="ctr"/>
+            <a:r>
+              <a:rPr sz="750" b="0">
+                <a:solidFill>
+                  <a:srgbClr val="999080"/>
+                </a:solidFill>
+                <a:latin typeface="メイリオ"/>
+              </a:rPr>
+              <a:t>百竜ノ淵源BONUS
+100G保障/討伐率72%
+成功で純増全UP</a:t>
+            </a:r>
+          </a:p>
+        </p:txBody>
+      </p:sp>
+      <p:sp>
+        <p:nvSpPr>
+          <p:cNvPr id="44" name="TextBox 43"/>
+          <p:cNvSpPr txBox="1"/>
+          <p:nvPr/>
+        </p:nvSpPr>
+        <p:spPr>
+          <a:xfrm>
+            <a:off x="256032" y="4325800"/>
+            <a:ext cx="3474720" cy="240000"/>
+          </a:xfrm>
+          <a:prstGeom prst="rect">
+            <a:avLst/>
+          </a:prstGeom>
+          <a:noFill/>
+        </p:spPr>
+        <p:txBody>
+          <a:bodyPr wrap="square">
+            <a:spAutoFit/>
+          </a:bodyPr>
+          <a:lstStyle/>
+          <a:p>
+            <a:pPr algn="l"/>
+            <a:r>
+              <a:rPr sz="750" b="0">
+                <a:solidFill>
+                  <a:srgbClr val="FF8800"/>
+                </a:solidFill>
+                <a:latin typeface="メイリオ"/>
+              </a:rPr>
+              <a:t>↺ 討伐失敗+ストックあり→集会所に戻り継続</a:t>
+            </a:r>
+          </a:p>
+        </p:txBody>
+      </p:sp>
+      <p:sp>
+        <p:nvSpPr>
+          <p:cNvPr id="45" name="Rectangle 44"/>
           <p:cNvSpPr/>
           <p:nvPr/>
         </p:nvSpPr>
         <p:spPr>
           <a:xfrm>
-            <a:off x="256032" y="2523744"/>
-            <a:ext cx="1508760" cy="1350000"/>
-          </a:xfrm>
-          <a:prstGeom prst="rect">
-            <a:avLst/>
-          </a:prstGeom>
-          <a:solidFill>
-            <a:srgbClr val="20180A"/>
-          </a:solidFill>
-          <a:ln w="22860">
-            <a:solidFill>
-              <a:srgbClr val="999080"/>
-            </a:solidFill>
+            <a:off x="256032" y="4565800"/>
+            <a:ext cx="3474720" cy="5000"/>
+          </a:xfrm>
+          <a:prstGeom prst="rect">
+            <a:avLst/>
+          </a:prstGeom>
+          <a:solidFill>
+            <a:srgbClr val="FF8800"/>
+          </a:solidFill>
+          <a:ln>
+            <a:noFill/>
           </a:ln>
         </p:spPr>
         <p:style>
@@ -5931,93 +6494,55 @@
       </p:sp>
       <p:sp>
         <p:nvSpPr>
-          <p:cNvPr id="32" name="TextBox 31"/>
-          <p:cNvSpPr txBox="1"/>
-          <p:nvPr/>
-        </p:nvSpPr>
-        <p:spPr>
-          <a:xfrm>
-            <a:off x="291032" y="2603744"/>
-            <a:ext cx="1448760" cy="390000"/>
-          </a:xfrm>
-          <a:prstGeom prst="rect">
-            <a:avLst/>
-          </a:prstGeom>
-          <a:noFill/>
-        </p:spPr>
-        <p:txBody>
-          <a:bodyPr wrap="square">
-            <a:spAutoFit/>
-          </a:bodyPr>
-          <a:lstStyle/>
-          <a:p>
-            <a:pPr algn="ctr"/>
-            <a:r>
-              <a:rPr sz="950" b="1">
+          <p:cNvPr id="46" name="TextBox 45"/>
+          <p:cNvSpPr txBox="1"/>
+          <p:nvPr/>
+        </p:nvSpPr>
+        <p:spPr>
+          <a:xfrm>
+            <a:off x="6675120" y="4919472"/>
+            <a:ext cx="2377440" cy="180000"/>
+          </a:xfrm>
+          <a:prstGeom prst="rect">
+            <a:avLst/>
+          </a:prstGeom>
+          <a:noFill/>
+        </p:spPr>
+        <p:txBody>
+          <a:bodyPr wrap="square">
+            <a:spAutoFit/>
+          </a:bodyPr>
+          <a:lstStyle/>
+          <a:p>
+            <a:pPr algn="r"/>
+            <a:r>
+              <a:rPr sz="650" b="0">
                 <a:solidFill>
                   <a:srgbClr val="999080"/>
                 </a:solidFill>
-                <a:latin typeface="游明朝"/>
-              </a:rPr>
-              <a:t>集会所
-(ループ起点)</a:t>
-            </a:r>
-          </a:p>
-        </p:txBody>
-      </p:sp>
-      <p:sp>
-        <p:nvSpPr>
-          <p:cNvPr id="33" name="TextBox 32"/>
-          <p:cNvSpPr txBox="1"/>
-          <p:nvPr/>
-        </p:nvSpPr>
-        <p:spPr>
-          <a:xfrm>
-            <a:off x="281032" y="3043744"/>
-            <a:ext cx="1463760" cy="760000"/>
-          </a:xfrm>
-          <a:prstGeom prst="rect">
-            <a:avLst/>
-          </a:prstGeom>
-          <a:noFill/>
-        </p:spPr>
-        <p:txBody>
-          <a:bodyPr wrap="square">
-            <a:spAutoFit/>
-          </a:bodyPr>
-          <a:lstStyle/>
-          <a:p>
-            <a:pPr algn="ctr"/>
-            <a:r>
-              <a:rPr sz="750" b="0">
-                <a:solidFill>
-                  <a:srgbClr val="999080"/>
-                </a:solidFill>
                 <a:latin typeface="メイリオ"/>
               </a:rPr>
-              <a:t>AT継続の起点
-討伐失敗でも
-ストックで復帰</a:t>
-            </a:r>
-          </a:p>
-        </p:txBody>
-      </p:sp>
-      <p:sp>
-        <p:nvSpPr>
-          <p:cNvPr id="34" name="Can 33"/>
+              <a:t>※ネット解析情報より（ちょんぼりすた・なな徹・一撃・pachiseven）</a:t>
+            </a:r>
+          </a:p>
+        </p:txBody>
+      </p:sp>
+      <p:sp>
+        <p:nvSpPr>
+          <p:cNvPr id="47" name="Rectangle 46"/>
           <p:cNvSpPr/>
           <p:nvPr/>
         </p:nvSpPr>
         <p:spPr>
           <a:xfrm>
-            <a:off x="1774792" y="3108744"/>
-            <a:ext cx="200000" cy="180000"/>
-          </a:xfrm>
-          <a:prstGeom prst="can">
-            <a:avLst/>
-          </a:prstGeom>
-          <a:solidFill>
-            <a:srgbClr val="FF8800"/>
+            <a:off x="0" y="4645152"/>
+            <a:ext cx="9144000" cy="498348"/>
+          </a:xfrm>
+          <a:prstGeom prst="rect">
+            <a:avLst/>
+          </a:prstGeom>
+          <a:solidFill>
+            <a:srgbClr val="100C04"/>
           </a:solidFill>
           <a:ln>
             <a:noFill/>
@@ -6047,25 +6572,23 @@
       </p:sp>
       <p:sp>
         <p:nvSpPr>
-          <p:cNvPr id="35" name="Rectangle 34"/>
+          <p:cNvPr id="48" name="Rectangle 47"/>
           <p:cNvSpPr/>
           <p:nvPr/>
         </p:nvSpPr>
         <p:spPr>
           <a:xfrm>
-            <a:off x="1920240" y="2523744"/>
-            <a:ext cx="1508760" cy="1350000"/>
-          </a:xfrm>
-          <a:prstGeom prst="rect">
-            <a:avLst/>
-          </a:prstGeom>
-          <a:solidFill>
-            <a:srgbClr val="181208"/>
-          </a:solidFill>
-          <a:ln w="22860">
-            <a:solidFill>
-              <a:srgbClr val="FF8800"/>
-            </a:solidFill>
+            <a:off x="0" y="4645152"/>
+            <a:ext cx="20000" cy="498348"/>
+          </a:xfrm>
+          <a:prstGeom prst="rect">
+            <a:avLst/>
+          </a:prstGeom>
+          <a:solidFill>
+            <a:srgbClr val="22AA44"/>
+          </a:solidFill>
+          <a:ln>
+            <a:noFill/>
           </a:ln>
         </p:spPr>
         <p:style>
@@ -6092,762 +6615,7 @@
       </p:sp>
       <p:sp>
         <p:nvSpPr>
-          <p:cNvPr id="36" name="TextBox 35"/>
-          <p:cNvSpPr txBox="1"/>
-          <p:nvPr/>
-        </p:nvSpPr>
-        <p:spPr>
-          <a:xfrm>
-            <a:off x="1955240" y="2603744"/>
-            <a:ext cx="1448760" cy="390000"/>
-          </a:xfrm>
-          <a:prstGeom prst="rect">
-            <a:avLst/>
-          </a:prstGeom>
-          <a:noFill/>
-        </p:spPr>
-        <p:txBody>
-          <a:bodyPr wrap="square">
-            <a:spAutoFit/>
-          </a:bodyPr>
-          <a:lstStyle/>
-          <a:p>
-            <a:pPr algn="ctr"/>
-            <a:r>
-              <a:rPr sz="950" b="1">
-                <a:solidFill>
-                  <a:srgbClr val="FF8800"/>
-                </a:solidFill>
-                <a:latin typeface="游明朝"/>
-              </a:rPr>
-              <a:t>狩猟ボーナス
-(超抽選バトル)</a:t>
-            </a:r>
-          </a:p>
-        </p:txBody>
-      </p:sp>
-      <p:sp>
-        <p:nvSpPr>
-          <p:cNvPr id="37" name="TextBox 36"/>
-          <p:cNvSpPr txBox="1"/>
-          <p:nvPr/>
-        </p:nvSpPr>
-        <p:spPr>
-          <a:xfrm>
-            <a:off x="1945240" y="3043744"/>
-            <a:ext cx="1463760" cy="760000"/>
-          </a:xfrm>
-          <a:prstGeom prst="rect">
-            <a:avLst/>
-          </a:prstGeom>
-          <a:noFill/>
-        </p:spPr>
-        <p:txBody>
-          <a:bodyPr wrap="square">
-            <a:spAutoFit/>
-          </a:bodyPr>
-          <a:lstStyle/>
-          <a:p>
-            <a:pPr algn="ctr"/>
-            <a:r>
-              <a:rPr sz="750" b="0">
-                <a:solidFill>
-                  <a:srgbClr val="999080"/>
-                </a:solidFill>
-                <a:latin typeface="メイリオ"/>
-              </a:rPr>
-              <a:t>BAR/赤7/紫7の3種
-討伐成功→剥ぎ取り
-討伐失敗→集会所</a:t>
-            </a:r>
-          </a:p>
-        </p:txBody>
-      </p:sp>
-      <p:sp>
-        <p:nvSpPr>
-          <p:cNvPr id="38" name="Can 37"/>
-          <p:cNvSpPr/>
-          <p:nvPr/>
-        </p:nvSpPr>
-        <p:spPr>
-          <a:xfrm>
-            <a:off x="3439000" y="3108744"/>
-            <a:ext cx="200000" cy="180000"/>
-          </a:xfrm>
-          <a:prstGeom prst="can">
-            <a:avLst/>
-          </a:prstGeom>
-          <a:solidFill>
-            <a:srgbClr val="CCAA22"/>
-          </a:solidFill>
-          <a:ln>
-            <a:noFill/>
-          </a:ln>
-        </p:spPr>
-        <p:style>
-          <a:lnRef idx="1">
-            <a:schemeClr val="accent1"/>
-          </a:lnRef>
-          <a:fillRef idx="3">
-            <a:schemeClr val="accent1"/>
-          </a:fillRef>
-          <a:effectRef idx="2">
-            <a:schemeClr val="accent1"/>
-          </a:effectRef>
-          <a:fontRef idx="minor">
-            <a:schemeClr val="lt1"/>
-          </a:fontRef>
-        </p:style>
-        <p:txBody>
-          <a:bodyPr rtlCol="0" anchor="ctr"/>
-          <a:lstStyle/>
-          <a:p>
-            <a:pPr algn="ctr"/>
-          </a:p>
-        </p:txBody>
-      </p:sp>
-      <p:sp>
-        <p:nvSpPr>
-          <p:cNvPr id="39" name="Rectangle 38"/>
-          <p:cNvSpPr/>
-          <p:nvPr/>
-        </p:nvSpPr>
-        <p:spPr>
-          <a:xfrm>
-            <a:off x="3584448" y="2523744"/>
-            <a:ext cx="1508760" cy="1350000"/>
-          </a:xfrm>
-          <a:prstGeom prst="rect">
-            <a:avLst/>
-          </a:prstGeom>
-          <a:solidFill>
-            <a:srgbClr val="181208"/>
-          </a:solidFill>
-          <a:ln w="22860">
-            <a:solidFill>
-              <a:srgbClr val="22AA44"/>
-            </a:solidFill>
-          </a:ln>
-        </p:spPr>
-        <p:style>
-          <a:lnRef idx="1">
-            <a:schemeClr val="accent1"/>
-          </a:lnRef>
-          <a:fillRef idx="3">
-            <a:schemeClr val="accent1"/>
-          </a:fillRef>
-          <a:effectRef idx="2">
-            <a:schemeClr val="accent1"/>
-          </a:effectRef>
-          <a:fontRef idx="minor">
-            <a:schemeClr val="lt1"/>
-          </a:fontRef>
-        </p:style>
-        <p:txBody>
-          <a:bodyPr rtlCol="0" anchor="ctr"/>
-          <a:lstStyle/>
-          <a:p>
-            <a:pPr algn="ctr"/>
-          </a:p>
-        </p:txBody>
-      </p:sp>
-      <p:sp>
-        <p:nvSpPr>
-          <p:cNvPr id="40" name="TextBox 39"/>
-          <p:cNvSpPr txBox="1"/>
-          <p:nvPr/>
-        </p:nvSpPr>
-        <p:spPr>
-          <a:xfrm>
-            <a:off x="3619448" y="2603744"/>
-            <a:ext cx="1448760" cy="390000"/>
-          </a:xfrm>
-          <a:prstGeom prst="rect">
-            <a:avLst/>
-          </a:prstGeom>
-          <a:noFill/>
-        </p:spPr>
-        <p:txBody>
-          <a:bodyPr wrap="square">
-            <a:spAutoFit/>
-          </a:bodyPr>
-          <a:lstStyle/>
-          <a:p>
-            <a:pPr algn="ctr"/>
-            <a:r>
-              <a:rPr sz="950" b="1">
-                <a:solidFill>
-                  <a:srgbClr val="22AA44"/>
-                </a:solidFill>
-                <a:latin typeface="游明朝"/>
-              </a:rPr>
-              <a:t>剥ぎ取りチャンス
-/百竜刀</a:t>
-            </a:r>
-          </a:p>
-        </p:txBody>
-      </p:sp>
-      <p:sp>
-        <p:nvSpPr>
-          <p:cNvPr id="41" name="TextBox 40"/>
-          <p:cNvSpPr txBox="1"/>
-          <p:nvPr/>
-        </p:nvSpPr>
-        <p:spPr>
-          <a:xfrm>
-            <a:off x="3609448" y="3043744"/>
-            <a:ext cx="1463760" cy="760000"/>
-          </a:xfrm>
-          <a:prstGeom prst="rect">
-            <a:avLst/>
-          </a:prstGeom>
-          <a:noFill/>
-        </p:spPr>
-        <p:txBody>
-          <a:bodyPr wrap="square">
-            <a:spAutoFit/>
-          </a:bodyPr>
-          <a:lstStyle/>
-          <a:p>
-            <a:pPr algn="ctr"/>
-            <a:r>
-              <a:rPr sz="750" b="0">
-                <a:solidFill>
-                  <a:srgbClr val="999080"/>
-                </a:solidFill>
-                <a:latin typeface="メイリオ"/>
-              </a:rPr>
-              <a:t>討伐後の報酬タイム
-早期討伐で百竜刀
-(ストック特化)へ</a:t>
-            </a:r>
-          </a:p>
-        </p:txBody>
-      </p:sp>
-      <p:sp>
-        <p:nvSpPr>
-          <p:cNvPr id="42" name="Can 41"/>
-          <p:cNvSpPr/>
-          <p:nvPr/>
-        </p:nvSpPr>
-        <p:spPr>
-          <a:xfrm>
-            <a:off x="5103208" y="3108744"/>
-            <a:ext cx="200000" cy="180000"/>
-          </a:xfrm>
-          <a:prstGeom prst="can">
-            <a:avLst/>
-          </a:prstGeom>
-          <a:solidFill>
-            <a:srgbClr val="CCAA22"/>
-          </a:solidFill>
-          <a:ln>
-            <a:noFill/>
-          </a:ln>
-        </p:spPr>
-        <p:style>
-          <a:lnRef idx="1">
-            <a:schemeClr val="accent1"/>
-          </a:lnRef>
-          <a:fillRef idx="3">
-            <a:schemeClr val="accent1"/>
-          </a:fillRef>
-          <a:effectRef idx="2">
-            <a:schemeClr val="accent1"/>
-          </a:effectRef>
-          <a:fontRef idx="minor">
-            <a:schemeClr val="lt1"/>
-          </a:fontRef>
-        </p:style>
-        <p:txBody>
-          <a:bodyPr rtlCol="0" anchor="ctr"/>
-          <a:lstStyle/>
-          <a:p>
-            <a:pPr algn="ctr"/>
-          </a:p>
-        </p:txBody>
-      </p:sp>
-      <p:sp>
-        <p:nvSpPr>
-          <p:cNvPr id="43" name="Rectangle 42"/>
-          <p:cNvSpPr/>
-          <p:nvPr/>
-        </p:nvSpPr>
-        <p:spPr>
-          <a:xfrm>
-            <a:off x="5248656" y="2523744"/>
-            <a:ext cx="1508760" cy="1350000"/>
-          </a:xfrm>
-          <a:prstGeom prst="rect">
-            <a:avLst/>
-          </a:prstGeom>
-          <a:solidFill>
-            <a:srgbClr val="181208"/>
-          </a:solidFill>
-          <a:ln w="22860">
-            <a:solidFill>
-              <a:srgbClr val="FFDD44"/>
-            </a:solidFill>
-          </a:ln>
-        </p:spPr>
-        <p:style>
-          <a:lnRef idx="1">
-            <a:schemeClr val="accent1"/>
-          </a:lnRef>
-          <a:fillRef idx="3">
-            <a:schemeClr val="accent1"/>
-          </a:fillRef>
-          <a:effectRef idx="2">
-            <a:schemeClr val="accent1"/>
-          </a:effectRef>
-          <a:fontRef idx="minor">
-            <a:schemeClr val="lt1"/>
-          </a:fontRef>
-        </p:style>
-        <p:txBody>
-          <a:bodyPr rtlCol="0" anchor="ctr"/>
-          <a:lstStyle/>
-          <a:p>
-            <a:pPr algn="ctr"/>
-          </a:p>
-        </p:txBody>
-      </p:sp>
-      <p:sp>
-        <p:nvSpPr>
-          <p:cNvPr id="44" name="TextBox 43"/>
-          <p:cNvSpPr txBox="1"/>
-          <p:nvPr/>
-        </p:nvSpPr>
-        <p:spPr>
-          <a:xfrm>
-            <a:off x="5283656" y="2603744"/>
-            <a:ext cx="1448760" cy="390000"/>
-          </a:xfrm>
-          <a:prstGeom prst="rect">
-            <a:avLst/>
-          </a:prstGeom>
-          <a:noFill/>
-        </p:spPr>
-        <p:txBody>
-          <a:bodyPr wrap="square">
-            <a:spAutoFit/>
-          </a:bodyPr>
-          <a:lstStyle/>
-          <a:p>
-            <a:pPr algn="ctr"/>
-            <a:r>
-              <a:rPr sz="950" b="1">
-                <a:solidFill>
-                  <a:srgbClr val="FFDD44"/>
-                </a:solidFill>
-                <a:latin typeface="游明朝"/>
-              </a:rPr>
-              <a:t>エンディング
-(10頭討伐)</a:t>
-            </a:r>
-          </a:p>
-        </p:txBody>
-      </p:sp>
-      <p:sp>
-        <p:nvSpPr>
-          <p:cNvPr id="45" name="TextBox 44"/>
-          <p:cNvSpPr txBox="1"/>
-          <p:nvPr/>
-        </p:nvSpPr>
-        <p:spPr>
-          <a:xfrm>
-            <a:off x="5273656" y="3043744"/>
-            <a:ext cx="1463760" cy="760000"/>
-          </a:xfrm>
-          <a:prstGeom prst="rect">
-            <a:avLst/>
-          </a:prstGeom>
-          <a:noFill/>
-        </p:spPr>
-        <p:txBody>
-          <a:bodyPr wrap="square">
-            <a:spAutoFit/>
-          </a:bodyPr>
-          <a:lstStyle/>
-          <a:p>
-            <a:pPr algn="ctr"/>
-            <a:r>
-              <a:rPr sz="750" b="0">
-                <a:solidFill>
-                  <a:srgbClr val="999080"/>
-                </a:solidFill>
-                <a:latin typeface="メイリオ"/>
-              </a:rPr>
-              <a:t>10頭討伐達成で
-百竜ノ淵源
-チャレンジへ</a:t>
-            </a:r>
-          </a:p>
-        </p:txBody>
-      </p:sp>
-      <p:sp>
-        <p:nvSpPr>
-          <p:cNvPr id="46" name="Can 45"/>
-          <p:cNvSpPr/>
-          <p:nvPr/>
-        </p:nvSpPr>
-        <p:spPr>
-          <a:xfrm>
-            <a:off x="6767416" y="3108744"/>
-            <a:ext cx="200000" cy="180000"/>
-          </a:xfrm>
-          <a:prstGeom prst="can">
-            <a:avLst/>
-          </a:prstGeom>
-          <a:solidFill>
-            <a:srgbClr val="CCAA22"/>
-          </a:solidFill>
-          <a:ln>
-            <a:noFill/>
-          </a:ln>
-        </p:spPr>
-        <p:style>
-          <a:lnRef idx="1">
-            <a:schemeClr val="accent1"/>
-          </a:lnRef>
-          <a:fillRef idx="3">
-            <a:schemeClr val="accent1"/>
-          </a:fillRef>
-          <a:effectRef idx="2">
-            <a:schemeClr val="accent1"/>
-          </a:effectRef>
-          <a:fontRef idx="minor">
-            <a:schemeClr val="lt1"/>
-          </a:fontRef>
-        </p:style>
-        <p:txBody>
-          <a:bodyPr rtlCol="0" anchor="ctr"/>
-          <a:lstStyle/>
-          <a:p>
-            <a:pPr algn="ctr"/>
-          </a:p>
-        </p:txBody>
-      </p:sp>
-      <p:sp>
-        <p:nvSpPr>
-          <p:cNvPr id="47" name="Rectangle 46"/>
-          <p:cNvSpPr/>
-          <p:nvPr/>
-        </p:nvSpPr>
-        <p:spPr>
-          <a:xfrm>
-            <a:off x="6912864" y="2523744"/>
-            <a:ext cx="1508760" cy="1350000"/>
-          </a:xfrm>
-          <a:prstGeom prst="rect">
-            <a:avLst/>
-          </a:prstGeom>
-          <a:solidFill>
-            <a:srgbClr val="141002"/>
-          </a:solidFill>
-          <a:ln w="22860">
-            <a:solidFill>
-              <a:srgbClr val="CCAA22"/>
-            </a:solidFill>
-          </a:ln>
-        </p:spPr>
-        <p:style>
-          <a:lnRef idx="1">
-            <a:schemeClr val="accent1"/>
-          </a:lnRef>
-          <a:fillRef idx="3">
-            <a:schemeClr val="accent1"/>
-          </a:fillRef>
-          <a:effectRef idx="2">
-            <a:schemeClr val="accent1"/>
-          </a:effectRef>
-          <a:fontRef idx="minor">
-            <a:schemeClr val="lt1"/>
-          </a:fontRef>
-        </p:style>
-        <p:txBody>
-          <a:bodyPr rtlCol="0" anchor="ctr"/>
-          <a:lstStyle/>
-          <a:p>
-            <a:pPr algn="ctr"/>
-          </a:p>
-        </p:txBody>
-      </p:sp>
-      <p:sp>
-        <p:nvSpPr>
-          <p:cNvPr id="48" name="TextBox 47"/>
-          <p:cNvSpPr txBox="1"/>
-          <p:nvPr/>
-        </p:nvSpPr>
-        <p:spPr>
-          <a:xfrm>
-            <a:off x="6947864" y="2603744"/>
-            <a:ext cx="1448760" cy="390000"/>
-          </a:xfrm>
-          <a:prstGeom prst="rect">
-            <a:avLst/>
-          </a:prstGeom>
-          <a:noFill/>
-        </p:spPr>
-        <p:txBody>
-          <a:bodyPr wrap="square">
-            <a:spAutoFit/>
-          </a:bodyPr>
-          <a:lstStyle/>
-          <a:p>
-            <a:pPr algn="ctr"/>
-            <a:r>
-              <a:rPr sz="950" b="1">
-                <a:solidFill>
-                  <a:srgbClr val="CCAA22"/>
-                </a:solidFill>
-                <a:latin typeface="游明朝"/>
-              </a:rPr>
-              <a:t>気焔万丈
-(上位AT)</a:t>
-            </a:r>
-          </a:p>
-        </p:txBody>
-      </p:sp>
-      <p:sp>
-        <p:nvSpPr>
           <p:cNvPr id="49" name="TextBox 48"/>
-          <p:cNvSpPr txBox="1"/>
-          <p:nvPr/>
-        </p:nvSpPr>
-        <p:spPr>
-          <a:xfrm>
-            <a:off x="6937864" y="3043744"/>
-            <a:ext cx="1463760" cy="760000"/>
-          </a:xfrm>
-          <a:prstGeom prst="rect">
-            <a:avLst/>
-          </a:prstGeom>
-          <a:noFill/>
-        </p:spPr>
-        <p:txBody>
-          <a:bodyPr wrap="square">
-            <a:spAutoFit/>
-          </a:bodyPr>
-          <a:lstStyle/>
-          <a:p>
-            <a:pPr algn="ctr"/>
-            <a:r>
-              <a:rPr sz="750" b="0">
-                <a:solidFill>
-                  <a:srgbClr val="999080"/>
-                </a:solidFill>
-                <a:latin typeface="メイリオ"/>
-              </a:rPr>
-              <a:t>百竜ノ淵源BONUS
-成功(約72%)で突入
-全ボーナス純増UP</a:t>
-            </a:r>
-          </a:p>
-        </p:txBody>
-      </p:sp>
-      <p:sp>
-        <p:nvSpPr>
-          <p:cNvPr id="50" name="TextBox 49"/>
-          <p:cNvSpPr txBox="1"/>
-          <p:nvPr/>
-        </p:nvSpPr>
-        <p:spPr>
-          <a:xfrm>
-            <a:off x="256032" y="3893744"/>
-            <a:ext cx="3474720" cy="250000"/>
-          </a:xfrm>
-          <a:prstGeom prst="rect">
-            <a:avLst/>
-          </a:prstGeom>
-          <a:noFill/>
-        </p:spPr>
-        <p:txBody>
-          <a:bodyPr wrap="square">
-            <a:spAutoFit/>
-          </a:bodyPr>
-          <a:lstStyle/>
-          <a:p>
-            <a:pPr algn="l"/>
-            <a:r>
-              <a:rPr sz="750" b="0">
-                <a:solidFill>
-                  <a:srgbClr val="FF8800"/>
-                </a:solidFill>
-                <a:latin typeface="メイリオ"/>
-              </a:rPr>
-              <a:t>↺ 討伐失敗+ストックあり→集会所に戻り何度でも継続</a:t>
-            </a:r>
-          </a:p>
-        </p:txBody>
-      </p:sp>
-      <p:sp>
-        <p:nvSpPr>
-          <p:cNvPr id="51" name="Rectangle 50"/>
-          <p:cNvSpPr/>
-          <p:nvPr/>
-        </p:nvSpPr>
-        <p:spPr>
-          <a:xfrm>
-            <a:off x="256032" y="4123744"/>
-            <a:ext cx="3474720" cy="5000"/>
-          </a:xfrm>
-          <a:prstGeom prst="rect">
-            <a:avLst/>
-          </a:prstGeom>
-          <a:solidFill>
-            <a:srgbClr val="FF8800"/>
-          </a:solidFill>
-          <a:ln>
-            <a:noFill/>
-          </a:ln>
-        </p:spPr>
-        <p:style>
-          <a:lnRef idx="1">
-            <a:schemeClr val="accent1"/>
-          </a:lnRef>
-          <a:fillRef idx="3">
-            <a:schemeClr val="accent1"/>
-          </a:fillRef>
-          <a:effectRef idx="2">
-            <a:schemeClr val="accent1"/>
-          </a:effectRef>
-          <a:fontRef idx="minor">
-            <a:schemeClr val="lt1"/>
-          </a:fontRef>
-        </p:style>
-        <p:txBody>
-          <a:bodyPr rtlCol="0" anchor="ctr"/>
-          <a:lstStyle/>
-          <a:p>
-            <a:pPr algn="ctr"/>
-          </a:p>
-        </p:txBody>
-      </p:sp>
-      <p:sp>
-        <p:nvSpPr>
-          <p:cNvPr id="52" name="TextBox 51"/>
-          <p:cNvSpPr txBox="1"/>
-          <p:nvPr/>
-        </p:nvSpPr>
-        <p:spPr>
-          <a:xfrm>
-            <a:off x="6675120" y="4919472"/>
-            <a:ext cx="2377440" cy="180000"/>
-          </a:xfrm>
-          <a:prstGeom prst="rect">
-            <a:avLst/>
-          </a:prstGeom>
-          <a:noFill/>
-        </p:spPr>
-        <p:txBody>
-          <a:bodyPr wrap="square">
-            <a:spAutoFit/>
-          </a:bodyPr>
-          <a:lstStyle/>
-          <a:p>
-            <a:pPr algn="r"/>
-            <a:r>
-              <a:rPr sz="650" b="0">
-                <a:solidFill>
-                  <a:srgbClr val="999080"/>
-                </a:solidFill>
-                <a:latin typeface="メイリオ"/>
-              </a:rPr>
-              <a:t>※ネット解析情報より（ちょんぼりすた・なな徹・一撃・pachiseven）</a:t>
-            </a:r>
-          </a:p>
-        </p:txBody>
-      </p:sp>
-      <p:sp>
-        <p:nvSpPr>
-          <p:cNvPr id="53" name="Rectangle 52"/>
-          <p:cNvSpPr/>
-          <p:nvPr/>
-        </p:nvSpPr>
-        <p:spPr>
-          <a:xfrm>
-            <a:off x="0" y="4645152"/>
-            <a:ext cx="9144000" cy="498348"/>
-          </a:xfrm>
-          <a:prstGeom prst="rect">
-            <a:avLst/>
-          </a:prstGeom>
-          <a:solidFill>
-            <a:srgbClr val="100C04"/>
-          </a:solidFill>
-          <a:ln>
-            <a:noFill/>
-          </a:ln>
-        </p:spPr>
-        <p:style>
-          <a:lnRef idx="1">
-            <a:schemeClr val="accent1"/>
-          </a:lnRef>
-          <a:fillRef idx="3">
-            <a:schemeClr val="accent1"/>
-          </a:fillRef>
-          <a:effectRef idx="2">
-            <a:schemeClr val="accent1"/>
-          </a:effectRef>
-          <a:fontRef idx="minor">
-            <a:schemeClr val="lt1"/>
-          </a:fontRef>
-        </p:style>
-        <p:txBody>
-          <a:bodyPr rtlCol="0" anchor="ctr"/>
-          <a:lstStyle/>
-          <a:p>
-            <a:pPr algn="ctr"/>
-          </a:p>
-        </p:txBody>
-      </p:sp>
-      <p:sp>
-        <p:nvSpPr>
-          <p:cNvPr id="54" name="Rectangle 53"/>
-          <p:cNvSpPr/>
-          <p:nvPr/>
-        </p:nvSpPr>
-        <p:spPr>
-          <a:xfrm>
-            <a:off x="0" y="4645152"/>
-            <a:ext cx="20000" cy="498348"/>
-          </a:xfrm>
-          <a:prstGeom prst="rect">
-            <a:avLst/>
-          </a:prstGeom>
-          <a:solidFill>
-            <a:srgbClr val="22AA44"/>
-          </a:solidFill>
-          <a:ln>
-            <a:noFill/>
-          </a:ln>
-        </p:spPr>
-        <p:style>
-          <a:lnRef idx="1">
-            <a:schemeClr val="accent1"/>
-          </a:lnRef>
-          <a:fillRef idx="3">
-            <a:schemeClr val="accent1"/>
-          </a:fillRef>
-          <a:effectRef idx="2">
-            <a:schemeClr val="accent1"/>
-          </a:effectRef>
-          <a:fontRef idx="minor">
-            <a:schemeClr val="lt1"/>
-          </a:fontRef>
-        </p:style>
-        <p:txBody>
-          <a:bodyPr rtlCol="0" anchor="ctr"/>
-          <a:lstStyle/>
-          <a:p>
-            <a:pPr algn="ctr"/>
-          </a:p>
-        </p:txBody>
-      </p:sp>
-      <p:sp>
-        <p:nvSpPr>
-          <p:cNvPr id="55" name="TextBox 54"/>
           <p:cNvSpPr txBox="1"/>
           <p:nvPr/>
         </p:nvSpPr>
@@ -6875,14 +6643,14 @@
                 </a:solidFill>
                 <a:latin typeface="メイリオ"/>
               </a:rPr>
-              <a:t>上段=通常時3ルート（クエスト/だるま落とし/百竜夜行）＋レア役ライズゾーンでPT加速</a:t>
-            </a:r>
-          </a:p>
-        </p:txBody>
-      </p:sp>
-      <p:sp>
-        <p:nvSpPr>
-          <p:cNvPr id="56" name="TextBox 55"/>
+              <a:t>上段=カムラPT(クエスト/百竜夜行)とリプレイ規定(だるま落とし)が独立した2カウンターで並行</a:t>
+            </a:r>
+          </a:p>
+        </p:txBody>
+      </p:sp>
+      <p:sp>
+        <p:nvSpPr>
+          <p:cNvPr id="50" name="TextBox 49"/>
           <p:cNvSpPr txBox="1"/>
           <p:nvPr/>
         </p:nvSpPr>
@@ -6910,7 +6678,7 @@
                 </a:solidFill>
                 <a:latin typeface="メイリオ"/>
               </a:rPr>
-              <a:t>下段=AT集会所ループ（討伐失敗でも継続）→10頭達成→百竜ノ淵源→気焔万丈へ昇格</a:t>
+              <a:t>下段=AT集会所ループ(10頭討伐)→百竜ノ淵源BONUS(72%)→気焔万丈昇格</a:t>
             </a:r>
           </a:p>
         </p:txBody>
